--- a/Portofolio-Analisis-Gempa-Bumi.pptx
+++ b/Portofolio-Analisis-Gempa-Bumi.pptx
@@ -3093,7 +3093,7 @@
     <p:bg>
       <p:bgPr>
         <a:solidFill>
-          <a:srgbClr val="1E3A8A"/>
+          <a:srgbClr val="F1E9DA"/>
         </a:solidFill>
         <a:effectLst/>
       </p:bgPr>
@@ -3107,14 +3107,58 @@
       <p:grpSpPr/>
       <p:sp>
         <p:nvSpPr>
-          <p:cNvPr id="2" name="TextBox 1"/>
+          <p:cNvPr id="2" name="Rectangle 1"/>
+          <p:cNvSpPr/>
+          <p:nvPr/>
+        </p:nvSpPr>
+        <p:spPr>
+          <a:xfrm>
+            <a:off x="7818120" y="0"/>
+            <a:ext cx="4373575" cy="6858000"/>
+          </a:xfrm>
+          <a:prstGeom prst="rect">
+            <a:avLst/>
+          </a:prstGeom>
+          <a:solidFill>
+            <a:srgbClr val="A34A38"/>
+          </a:solidFill>
+          <a:ln>
+            <a:noFill/>
+          </a:ln>
+          <a:effectLst/>
+        </p:spPr>
+        <p:style>
+          <a:lnRef idx="1">
+            <a:schemeClr val="accent1"/>
+          </a:lnRef>
+          <a:fillRef idx="3">
+            <a:schemeClr val="accent1"/>
+          </a:fillRef>
+          <a:effectRef idx="2">
+            <a:schemeClr val="accent1"/>
+          </a:effectRef>
+          <a:fontRef idx="minor">
+            <a:schemeClr val="lt1"/>
+          </a:fontRef>
+        </p:style>
+        <p:txBody>
+          <a:bodyPr rtlCol="0" anchor="ctr"/>
+          <a:lstStyle/>
+          <a:p>
+            <a:pPr algn="ctr"/>
+          </a:p>
+        </p:txBody>
+      </p:sp>
+      <p:sp>
+        <p:nvSpPr>
+          <p:cNvPr id="3" name="TextBox 2"/>
           <p:cNvSpPr txBox="1"/>
           <p:nvPr/>
         </p:nvSpPr>
         <p:spPr>
           <a:xfrm>
-            <a:off x="822960" y="914400"/>
-            <a:ext cx="10515600" cy="1097280"/>
+            <a:off x="8183879" y="685800"/>
+            <a:ext cx="3657600" cy="457200"/>
           </a:xfrm>
           <a:prstGeom prst="rect">
             <a:avLst/>
@@ -3129,30 +3173,31 @@
           <a:p>
             <a:pPr>
               <a:spcAft>
-                <a:spcPts val="800"/>
-              </a:spcAft>
-            </a:pPr>
-            <a:r>
-              <a:rPr sz="3800" b="1" i="0">
-                <a:solidFill>
-                  <a:srgbClr val="FFFFFF"/>
-                </a:solidFill>
-              </a:rPr>
-              <a:t>ANALISIS GEMPA BUMI INDONESIA 2015–2026</a:t>
-            </a:r>
-          </a:p>
-        </p:txBody>
-      </p:sp>
-      <p:sp>
-        <p:nvSpPr>
-          <p:cNvPr id="3" name="TextBox 2"/>
+                <a:spcPts val="0"/>
+              </a:spcAft>
+            </a:pPr>
+            <a:r>
+              <a:rPr sz="1300" b="1" i="0">
+                <a:solidFill>
+                  <a:srgbClr val="F1E9DA"/>
+                </a:solidFill>
+                <a:latin typeface="Noto Sans"/>
+              </a:rPr>
+              <a:t>GEMPA M≥4,5 TERCATAT</a:t>
+            </a:r>
+          </a:p>
+        </p:txBody>
+      </p:sp>
+      <p:sp>
+        <p:nvSpPr>
+          <p:cNvPr id="4" name="TextBox 3"/>
           <p:cNvSpPr txBox="1"/>
           <p:nvPr/>
         </p:nvSpPr>
         <p:spPr>
           <a:xfrm>
-            <a:off x="822960" y="2194560"/>
-            <a:ext cx="10515600" cy="914400"/>
+            <a:off x="8183879" y="1097280"/>
+            <a:ext cx="3749039" cy="1371600"/>
           </a:xfrm>
           <a:prstGeom prst="rect">
             <a:avLst/>
@@ -3167,30 +3212,75 @@
           <a:p>
             <a:pPr>
               <a:spcAft>
-                <a:spcPts val="800"/>
-              </a:spcAft>
-            </a:pPr>
-            <a:r>
-              <a:rPr sz="2000" b="0" i="0">
+                <a:spcPts val="0"/>
+              </a:spcAft>
+            </a:pPr>
+            <a:r>
+              <a:rPr sz="6800" b="1" i="0">
                 <a:solidFill>
                   <a:srgbClr val="FFFFFF"/>
                 </a:solidFill>
-              </a:rPr>
-              <a:t>Seberapa Sering, Seberapa Besar, dan Di Mana Gempa Mengguncang Indonesia</a:t>
-            </a:r>
-          </a:p>
-        </p:txBody>
-      </p:sp>
-      <p:sp>
-        <p:nvSpPr>
-          <p:cNvPr id="4" name="TextBox 3"/>
+                <a:latin typeface="Noto Sans"/>
+              </a:rPr>
+              <a:t>9.595</a:t>
+            </a:r>
+          </a:p>
+        </p:txBody>
+      </p:sp>
+      <p:sp>
+        <p:nvSpPr>
+          <p:cNvPr id="5" name="Rectangle 4"/>
+          <p:cNvSpPr/>
+          <p:nvPr/>
+        </p:nvSpPr>
+        <p:spPr>
+          <a:xfrm>
+            <a:off x="8202168" y="2606040"/>
+            <a:ext cx="1005840" cy="73152"/>
+          </a:xfrm>
+          <a:prstGeom prst="rect">
+            <a:avLst/>
+          </a:prstGeom>
+          <a:solidFill>
+            <a:srgbClr val="DE7A2D"/>
+          </a:solidFill>
+          <a:ln>
+            <a:noFill/>
+          </a:ln>
+          <a:effectLst/>
+        </p:spPr>
+        <p:style>
+          <a:lnRef idx="1">
+            <a:schemeClr val="accent1"/>
+          </a:lnRef>
+          <a:fillRef idx="3">
+            <a:schemeClr val="accent1"/>
+          </a:fillRef>
+          <a:effectRef idx="2">
+            <a:schemeClr val="accent1"/>
+          </a:effectRef>
+          <a:fontRef idx="minor">
+            <a:schemeClr val="lt1"/>
+          </a:fontRef>
+        </p:style>
+        <p:txBody>
+          <a:bodyPr rtlCol="0" anchor="ctr"/>
+          <a:lstStyle/>
+          <a:p>
+            <a:pPr algn="ctr"/>
+          </a:p>
+        </p:txBody>
+      </p:sp>
+      <p:sp>
+        <p:nvSpPr>
+          <p:cNvPr id="6" name="TextBox 5"/>
           <p:cNvSpPr txBox="1"/>
           <p:nvPr/>
         </p:nvSpPr>
         <p:spPr>
           <a:xfrm>
-            <a:off x="822960" y="3383280"/>
-            <a:ext cx="10515600" cy="1828800"/>
+            <a:off x="8183879" y="2971800"/>
+            <a:ext cx="3657600" cy="1005840"/>
           </a:xfrm>
           <a:prstGeom prst="rect">
             <a:avLst/>
@@ -3205,45 +3295,94 @@
           <a:p>
             <a:pPr>
               <a:spcAft>
-                <a:spcPts val="800"/>
-              </a:spcAft>
-            </a:pPr>
-            <a:r>
-              <a:rPr sz="1600" b="0" i="0">
+                <a:spcPts val="200"/>
+              </a:spcAft>
+            </a:pPr>
+            <a:r>
+              <a:rPr sz="4400" b="1" i="0">
                 <a:solidFill>
                   <a:srgbClr val="FFFFFF"/>
                 </a:solidFill>
-              </a:rPr>
-              <a:t>Katalog USGS 9.595 gempa M≥4,5 — 1 Januari 2015 sampai 20 Oktober 2026, plus snapshot real-time BMKG</a:t>
+                <a:latin typeface="Noto Sans"/>
+              </a:rPr>
+              <a:t>M7,8</a:t>
             </a:r>
           </a:p>
           <a:p>
             <a:pPr>
-              <a:spcAft>
-                <a:spcPts val="800"/>
-              </a:spcAft>
-            </a:pPr>
-            <a:r>
-              <a:rPr sz="1600" b="0" i="0">
-                <a:solidFill>
-                  <a:srgbClr val="FFFFFF"/>
-                </a:solidFill>
-              </a:rPr>
-              <a:t>Plus: paket dashboard Power BI (star schema, DAX, panduan rakit)</a:t>
-            </a:r>
-          </a:p>
-        </p:txBody>
-      </p:sp>
-      <p:sp>
-        <p:nvSpPr>
-          <p:cNvPr id="5" name="TextBox 4"/>
+              <a:lnSpc>
+                <a:spcPct val="110000"/>
+              </a:lnSpc>
+              <a:spcAft>
+                <a:spcPts val="0"/>
+              </a:spcAft>
+            </a:pPr>
+            <a:r>
+              <a:rPr sz="1150" b="1" i="0">
+                <a:solidFill>
+                  <a:srgbClr val="F1E9DA"/>
+                </a:solidFill>
+                <a:latin typeface="Noto Sans"/>
+              </a:rPr>
+              <a:t>GEMPA TERBESAR: ENDE, NTT (2026-08-15), KEDALAMAN 10 KM</a:t>
+            </a:r>
+          </a:p>
+        </p:txBody>
+      </p:sp>
+      <p:sp>
+        <p:nvSpPr>
+          <p:cNvPr id="7" name="Rectangle 6"/>
+          <p:cNvSpPr/>
+          <p:nvPr/>
+        </p:nvSpPr>
+        <p:spPr>
+          <a:xfrm>
+            <a:off x="7818120" y="5943600"/>
+            <a:ext cx="4373575" cy="914400"/>
+          </a:xfrm>
+          <a:prstGeom prst="rect">
+            <a:avLst/>
+          </a:prstGeom>
+          <a:solidFill>
+            <a:srgbClr val="DE7A2D"/>
+          </a:solidFill>
+          <a:ln>
+            <a:noFill/>
+          </a:ln>
+          <a:effectLst/>
+        </p:spPr>
+        <p:style>
+          <a:lnRef idx="1">
+            <a:schemeClr val="accent1"/>
+          </a:lnRef>
+          <a:fillRef idx="3">
+            <a:schemeClr val="accent1"/>
+          </a:fillRef>
+          <a:effectRef idx="2">
+            <a:schemeClr val="accent1"/>
+          </a:effectRef>
+          <a:fontRef idx="minor">
+            <a:schemeClr val="lt1"/>
+          </a:fontRef>
+        </p:style>
+        <p:txBody>
+          <a:bodyPr rtlCol="0" anchor="ctr"/>
+          <a:lstStyle/>
+          <a:p>
+            <a:pPr algn="ctr"/>
+          </a:p>
+        </p:txBody>
+      </p:sp>
+      <p:sp>
+        <p:nvSpPr>
+          <p:cNvPr id="8" name="TextBox 7"/>
           <p:cNvSpPr txBox="1"/>
           <p:nvPr/>
         </p:nvSpPr>
         <p:spPr>
           <a:xfrm>
-            <a:off x="822960" y="5486400"/>
-            <a:ext cx="10515600" cy="731520"/>
+            <a:off x="8183879" y="6236208"/>
+            <a:ext cx="3657600" cy="457200"/>
           </a:xfrm>
           <a:prstGeom prst="rect">
             <a:avLst/>
@@ -3258,14 +3397,300 @@
           <a:p>
             <a:pPr>
               <a:spcAft>
+                <a:spcPts val="0"/>
+              </a:spcAft>
+            </a:pPr>
+            <a:r>
+              <a:rPr sz="1250" b="1" i="0">
+                <a:solidFill>
+                  <a:srgbClr val="33231C"/>
+                </a:solidFill>
+                <a:latin typeface="Noto Sans"/>
+              </a:rPr>
+              <a:t>SNAPSHOT BMKG: 20 OKTOBER 2026</a:t>
+            </a:r>
+          </a:p>
+        </p:txBody>
+      </p:sp>
+      <p:sp>
+        <p:nvSpPr>
+          <p:cNvPr id="9" name="Rectangle 8"/>
+          <p:cNvSpPr/>
+          <p:nvPr/>
+        </p:nvSpPr>
+        <p:spPr>
+          <a:xfrm>
+            <a:off x="640080" y="777240"/>
+            <a:ext cx="256032" cy="256032"/>
+          </a:xfrm>
+          <a:prstGeom prst="rect">
+            <a:avLst/>
+          </a:prstGeom>
+          <a:solidFill>
+            <a:srgbClr val="DE7A2D"/>
+          </a:solidFill>
+          <a:ln>
+            <a:noFill/>
+          </a:ln>
+          <a:effectLst/>
+        </p:spPr>
+        <p:style>
+          <a:lnRef idx="1">
+            <a:schemeClr val="accent1"/>
+          </a:lnRef>
+          <a:fillRef idx="3">
+            <a:schemeClr val="accent1"/>
+          </a:fillRef>
+          <a:effectRef idx="2">
+            <a:schemeClr val="accent1"/>
+          </a:effectRef>
+          <a:fontRef idx="minor">
+            <a:schemeClr val="lt1"/>
+          </a:fontRef>
+        </p:style>
+        <p:txBody>
+          <a:bodyPr rtlCol="0" anchor="ctr"/>
+          <a:lstStyle/>
+          <a:p>
+            <a:pPr algn="ctr"/>
+          </a:p>
+        </p:txBody>
+      </p:sp>
+      <p:sp>
+        <p:nvSpPr>
+          <p:cNvPr id="10" name="TextBox 9"/>
+          <p:cNvSpPr txBox="1"/>
+          <p:nvPr/>
+        </p:nvSpPr>
+        <p:spPr>
+          <a:xfrm>
+            <a:off x="640080" y="1234440"/>
+            <a:ext cx="6858000" cy="1828800"/>
+          </a:xfrm>
+          <a:prstGeom prst="rect">
+            <a:avLst/>
+          </a:prstGeom>
+          <a:noFill/>
+        </p:spPr>
+        <p:txBody>
+          <a:bodyPr wrap="square">
+            <a:spAutoFit/>
+          </a:bodyPr>
+          <a:lstStyle/>
+          <a:p>
+            <a:pPr>
+              <a:spcAft>
+                <a:spcPts val="0"/>
+              </a:spcAft>
+            </a:pPr>
+            <a:r>
+              <a:rPr sz="4300" b="1" i="0">
+                <a:solidFill>
+                  <a:srgbClr val="33231C"/>
+                </a:solidFill>
+                <a:latin typeface="Noto Sans"/>
+              </a:rPr>
+              <a:t>GEMPA BUMI INDONESIA</a:t>
+            </a:r>
+          </a:p>
+          <a:p>
+            <a:pPr>
+              <a:spcAft>
+                <a:spcPts val="0"/>
+              </a:spcAft>
+            </a:pPr>
+            <a:r>
+              <a:rPr sz="4300" b="1" i="0">
+                <a:solidFill>
+                  <a:srgbClr val="A34A38"/>
+                </a:solidFill>
+                <a:latin typeface="Noto Sans"/>
+              </a:rPr>
+              <a:t>2015-2026</a:t>
+            </a:r>
+          </a:p>
+        </p:txBody>
+      </p:sp>
+      <p:sp>
+        <p:nvSpPr>
+          <p:cNvPr id="11" name="TextBox 10"/>
+          <p:cNvSpPr txBox="1"/>
+          <p:nvPr/>
+        </p:nvSpPr>
+        <p:spPr>
+          <a:xfrm>
+            <a:off x="640080" y="3017520"/>
+            <a:ext cx="6675120" cy="914400"/>
+          </a:xfrm>
+          <a:prstGeom prst="rect">
+            <a:avLst/>
+          </a:prstGeom>
+          <a:noFill/>
+        </p:spPr>
+        <p:txBody>
+          <a:bodyPr wrap="square">
+            <a:spAutoFit/>
+          </a:bodyPr>
+          <a:lstStyle/>
+          <a:p>
+            <a:pPr>
+              <a:lnSpc>
+                <a:spcPct val="115000"/>
+              </a:lnSpc>
+              <a:spcAft>
+                <a:spcPts val="0"/>
+              </a:spcAft>
+            </a:pPr>
+            <a:r>
+              <a:rPr sz="1900" b="0" i="0">
+                <a:solidFill>
+                  <a:srgbClr val="33231C"/>
+                </a:solidFill>
+                <a:latin typeface="Noto Sans"/>
+              </a:rPr>
+              <a:t>Seberapa Sering, Seberapa Besar, dan Di Mana Gempa Mengguncang Indonesia</a:t>
+            </a:r>
+          </a:p>
+        </p:txBody>
+      </p:sp>
+      <p:sp>
+        <p:nvSpPr>
+          <p:cNvPr id="12" name="TextBox 11"/>
+          <p:cNvSpPr txBox="1"/>
+          <p:nvPr/>
+        </p:nvSpPr>
+        <p:spPr>
+          <a:xfrm>
+            <a:off x="640080" y="4114800"/>
+            <a:ext cx="6583680" cy="1188720"/>
+          </a:xfrm>
+          <a:prstGeom prst="rect">
+            <a:avLst/>
+          </a:prstGeom>
+          <a:noFill/>
+        </p:spPr>
+        <p:txBody>
+          <a:bodyPr wrap="square">
+            <a:spAutoFit/>
+          </a:bodyPr>
+          <a:lstStyle/>
+          <a:p>
+            <a:pPr>
+              <a:lnSpc>
+                <a:spcPct val="115000"/>
+              </a:lnSpc>
+              <a:spcAft>
                 <a:spcPts val="800"/>
               </a:spcAft>
             </a:pPr>
             <a:r>
-              <a:rPr sz="2000" b="1" i="0">
-                <a:solidFill>
-                  <a:srgbClr val="FFFFFF"/>
-                </a:solidFill>
+              <a:rPr sz="1450" b="0" i="0">
+                <a:solidFill>
+                  <a:srgbClr val="33231C"/>
+                </a:solidFill>
+                <a:latin typeface="Noto Sans"/>
+              </a:rPr>
+              <a:t>Katalog USGS 9.595 gempa M≥4,5, 1 Januari 2015 sampai 20 Oktober 2026, plus snapshot real-time BMKG.</a:t>
+            </a:r>
+          </a:p>
+          <a:p>
+            <a:pPr>
+              <a:lnSpc>
+                <a:spcPct val="115000"/>
+              </a:lnSpc>
+              <a:spcAft>
+                <a:spcPts val="800"/>
+              </a:spcAft>
+            </a:pPr>
+            <a:r>
+              <a:rPr sz="1450" b="0" i="0">
+                <a:solidFill>
+                  <a:srgbClr val="33231C"/>
+                </a:solidFill>
+                <a:latin typeface="Noto Sans"/>
+              </a:rPr>
+              <a:t>Plus: paket dashboard Power BI (star schema, DAX, panduan rakit).</a:t>
+            </a:r>
+          </a:p>
+        </p:txBody>
+      </p:sp>
+      <p:sp>
+        <p:nvSpPr>
+          <p:cNvPr id="13" name="Rectangle 12"/>
+          <p:cNvSpPr/>
+          <p:nvPr/>
+        </p:nvSpPr>
+        <p:spPr>
+          <a:xfrm>
+            <a:off x="640080" y="5650992"/>
+            <a:ext cx="1463040" cy="64008"/>
+          </a:xfrm>
+          <a:prstGeom prst="rect">
+            <a:avLst/>
+          </a:prstGeom>
+          <a:solidFill>
+            <a:srgbClr val="A34A38"/>
+          </a:solidFill>
+          <a:ln>
+            <a:noFill/>
+          </a:ln>
+          <a:effectLst/>
+        </p:spPr>
+        <p:style>
+          <a:lnRef idx="1">
+            <a:schemeClr val="accent1"/>
+          </a:lnRef>
+          <a:fillRef idx="3">
+            <a:schemeClr val="accent1"/>
+          </a:fillRef>
+          <a:effectRef idx="2">
+            <a:schemeClr val="accent1"/>
+          </a:effectRef>
+          <a:fontRef idx="minor">
+            <a:schemeClr val="lt1"/>
+          </a:fontRef>
+        </p:style>
+        <p:txBody>
+          <a:bodyPr rtlCol="0" anchor="ctr"/>
+          <a:lstStyle/>
+          <a:p>
+            <a:pPr algn="ctr"/>
+          </a:p>
+        </p:txBody>
+      </p:sp>
+      <p:sp>
+        <p:nvSpPr>
+          <p:cNvPr id="14" name="TextBox 13"/>
+          <p:cNvSpPr txBox="1"/>
+          <p:nvPr/>
+        </p:nvSpPr>
+        <p:spPr>
+          <a:xfrm>
+            <a:off x="640080" y="5833872"/>
+            <a:ext cx="6858000" cy="502920"/>
+          </a:xfrm>
+          <a:prstGeom prst="rect">
+            <a:avLst/>
+          </a:prstGeom>
+          <a:noFill/>
+        </p:spPr>
+        <p:txBody>
+          <a:bodyPr wrap="square">
+            <a:spAutoFit/>
+          </a:bodyPr>
+          <a:lstStyle/>
+          <a:p>
+            <a:pPr>
+              <a:spcAft>
+                <a:spcPts val="0"/>
+              </a:spcAft>
+            </a:pPr>
+            <a:r>
+              <a:rPr sz="1700" b="1" i="0">
+                <a:solidFill>
+                  <a:srgbClr val="33231C"/>
+                </a:solidFill>
+                <a:latin typeface="Noto Sans"/>
               </a:rPr>
               <a:t>BAGHIZ ASSHIDDIQIE ARASYA</a:t>
             </a:r>
@@ -3286,7 +3711,7 @@
     <p:bg>
       <p:bgPr>
         <a:solidFill>
-          <a:srgbClr val="FFFFFF"/>
+          <a:srgbClr val="F1E9DA"/>
         </a:solidFill>
         <a:effectLst/>
       </p:bgPr>
@@ -3306,8 +3731,8 @@
         </p:nvSpPr>
         <p:spPr>
           <a:xfrm>
-            <a:off x="640080" y="274320"/>
-            <a:ext cx="10881360" cy="822960"/>
+            <a:off x="640080" y="384048"/>
+            <a:ext cx="10908792" cy="777240"/>
           </a:xfrm>
           <a:prstGeom prst="rect">
             <a:avLst/>
@@ -3322,16 +3747,17 @@
           <a:p>
             <a:pPr>
               <a:spcAft>
-                <a:spcPts val="800"/>
-              </a:spcAft>
-            </a:pPr>
-            <a:r>
-              <a:rPr sz="3000" b="1" i="0">
-                <a:solidFill>
-                  <a:srgbClr val="1E3A8A"/>
-                </a:solidFill>
-              </a:rPr>
-              <a:t>Penutup</a:t>
+                <a:spcPts val="0"/>
+              </a:spcAft>
+            </a:pPr>
+            <a:r>
+              <a:rPr sz="3100" b="1" i="0">
+                <a:solidFill>
+                  <a:srgbClr val="33231C"/>
+                </a:solidFill>
+                <a:latin typeface="Noto Sans"/>
+              </a:rPr>
+              <a:t>PENUTUP</a:t>
             </a:r>
           </a:p>
         </p:txBody>
@@ -3344,18 +3770,19 @@
         </p:nvSpPr>
         <p:spPr>
           <a:xfrm>
-            <a:off x="640080" y="1051560"/>
-            <a:ext cx="1371600" cy="54864"/>
+            <a:off x="658368" y="1188720"/>
+            <a:ext cx="1371600" cy="82296"/>
           </a:xfrm>
           <a:prstGeom prst="rect">
             <a:avLst/>
           </a:prstGeom>
           <a:solidFill>
-            <a:srgbClr val="0E7C7B"/>
+            <a:srgbClr val="A34A38"/>
           </a:solidFill>
           <a:ln>
             <a:noFill/>
           </a:ln>
+          <a:effectLst/>
         </p:spPr>
         <p:style>
           <a:lnRef idx="1">
@@ -3381,14 +3808,58 @@
       </p:sp>
       <p:sp>
         <p:nvSpPr>
-          <p:cNvPr id="4" name="TextBox 3"/>
+          <p:cNvPr id="4" name="Rectangle 3"/>
+          <p:cNvSpPr/>
+          <p:nvPr/>
+        </p:nvSpPr>
+        <p:spPr>
+          <a:xfrm>
+            <a:off x="640080" y="1463040"/>
+            <a:ext cx="3575304" cy="1188720"/>
+          </a:xfrm>
+          <a:prstGeom prst="rect">
+            <a:avLst/>
+          </a:prstGeom>
+          <a:solidFill>
+            <a:srgbClr val="A34A38"/>
+          </a:solidFill>
+          <a:ln>
+            <a:noFill/>
+          </a:ln>
+          <a:effectLst/>
+        </p:spPr>
+        <p:style>
+          <a:lnRef idx="1">
+            <a:schemeClr val="accent1"/>
+          </a:lnRef>
+          <a:fillRef idx="3">
+            <a:schemeClr val="accent1"/>
+          </a:fillRef>
+          <a:effectRef idx="2">
+            <a:schemeClr val="accent1"/>
+          </a:effectRef>
+          <a:fontRef idx="minor">
+            <a:schemeClr val="lt1"/>
+          </a:fontRef>
+        </p:style>
+        <p:txBody>
+          <a:bodyPr rtlCol="0" anchor="ctr"/>
+          <a:lstStyle/>
+          <a:p>
+            <a:pPr algn="ctr"/>
+          </a:p>
+        </p:txBody>
+      </p:sp>
+      <p:sp>
+        <p:nvSpPr>
+          <p:cNvPr id="5" name="TextBox 4"/>
           <p:cNvSpPr txBox="1"/>
           <p:nvPr/>
         </p:nvSpPr>
         <p:spPr>
           <a:xfrm>
-            <a:off x="640080" y="1371600"/>
-            <a:ext cx="10881360" cy="4754880"/>
+            <a:off x="868680" y="1591056"/>
+            <a:ext cx="3118104" cy="932688"/>
           </a:xfrm>
           <a:prstGeom prst="rect">
             <a:avLst/>
@@ -3401,80 +3872,467 @@
           </a:bodyPr>
           <a:lstStyle/>
           <a:p>
-            <a:pPr marL="171450" indent="-171450">
-              <a:spcBef>
+            <a:pPr>
+              <a:spcAft>
                 <a:spcPts val="200"/>
-              </a:spcBef>
-              <a:spcAft>
-                <a:spcPts val="1000"/>
-              </a:spcAft>
-              <a:buChar char="•"/>
-            </a:pPr>
-            <a:r>
-              <a:rPr sz="1700" b="0" i="0">
-                <a:solidFill>
-                  <a:srgbClr val="1F2937"/>
-                </a:solidFill>
-              </a:rPr>
-              <a:t>Tiga pesan utama: (1) Indonesia rata-rata diguncang 783 gempa M≥4,5 per tahun dan 71.3% di antaranya dangkal; (2) risiko besar terkonsentrasi di timur — Halmahera–Maluku, Banda, NTT, Sulawesi; (3) gempa M7+ memang langka (16 kali dalam 12 tahun) tetapi selalu datang tanpa jadwal.</a:t>
-            </a:r>
-          </a:p>
-          <a:p>
-            <a:pPr marL="171450" indent="-171450">
-              <a:spcBef>
+              </a:spcAft>
+            </a:pPr>
+            <a:r>
+              <a:rPr sz="2800" b="1" i="0">
+                <a:solidFill>
+                  <a:srgbClr val="FFFFFF"/>
+                </a:solidFill>
+                <a:latin typeface="Noto Sans"/>
+              </a:rPr>
+              <a:t>783</a:t>
+            </a:r>
+          </a:p>
+          <a:p>
+            <a:pPr>
+              <a:lnSpc>
+                <a:spcPct val="105000"/>
+              </a:lnSpc>
+              <a:spcAft>
+                <a:spcPts val="0"/>
+              </a:spcAft>
+            </a:pPr>
+            <a:r>
+              <a:rPr sz="1100" b="1" i="0">
+                <a:solidFill>
+                  <a:srgbClr val="FFFFFF"/>
+                </a:solidFill>
+                <a:latin typeface="Noto Sans"/>
+              </a:rPr>
+              <a:t>GEMPA M≥4,5 PER TAHUN, 71,3% DI ANTARANYA DANGKAL</a:t>
+            </a:r>
+          </a:p>
+        </p:txBody>
+      </p:sp>
+      <p:sp>
+        <p:nvSpPr>
+          <p:cNvPr id="6" name="Rectangle 5"/>
+          <p:cNvSpPr/>
+          <p:nvPr/>
+        </p:nvSpPr>
+        <p:spPr>
+          <a:xfrm>
+            <a:off x="4306824" y="1463040"/>
+            <a:ext cx="3575304" cy="1188720"/>
+          </a:xfrm>
+          <a:prstGeom prst="rect">
+            <a:avLst/>
+          </a:prstGeom>
+          <a:solidFill>
+            <a:srgbClr val="DE7A2D"/>
+          </a:solidFill>
+          <a:ln>
+            <a:noFill/>
+          </a:ln>
+          <a:effectLst/>
+        </p:spPr>
+        <p:style>
+          <a:lnRef idx="1">
+            <a:schemeClr val="accent1"/>
+          </a:lnRef>
+          <a:fillRef idx="3">
+            <a:schemeClr val="accent1"/>
+          </a:fillRef>
+          <a:effectRef idx="2">
+            <a:schemeClr val="accent1"/>
+          </a:effectRef>
+          <a:fontRef idx="minor">
+            <a:schemeClr val="lt1"/>
+          </a:fontRef>
+        </p:style>
+        <p:txBody>
+          <a:bodyPr rtlCol="0" anchor="ctr"/>
+          <a:lstStyle/>
+          <a:p>
+            <a:pPr algn="ctr"/>
+          </a:p>
+        </p:txBody>
+      </p:sp>
+      <p:sp>
+        <p:nvSpPr>
+          <p:cNvPr id="7" name="TextBox 6"/>
+          <p:cNvSpPr txBox="1"/>
+          <p:nvPr/>
+        </p:nvSpPr>
+        <p:spPr>
+          <a:xfrm>
+            <a:off x="4535424" y="1591056"/>
+            <a:ext cx="3118104" cy="932688"/>
+          </a:xfrm>
+          <a:prstGeom prst="rect">
+            <a:avLst/>
+          </a:prstGeom>
+          <a:noFill/>
+        </p:spPr>
+        <p:txBody>
+          <a:bodyPr wrap="square">
+            <a:spAutoFit/>
+          </a:bodyPr>
+          <a:lstStyle/>
+          <a:p>
+            <a:pPr>
+              <a:spcAft>
                 <a:spcPts val="200"/>
-              </a:spcBef>
-              <a:spcAft>
-                <a:spcPts val="1000"/>
-              </a:spcAft>
-              <a:buChar char="•"/>
-            </a:pPr>
-            <a:r>
-              <a:rPr sz="1700" b="0" i="0">
-                <a:solidFill>
-                  <a:srgbClr val="1F2937"/>
-                </a:solidFill>
-              </a:rPr>
-              <a:t>Paket dashboard Power BI tersedia di folder powerbi/: star schema 3 tabel, measure DAX siap tempel dengan tabel verifikasi, layout 4 halaman (termasuk halaman peta), dan panduan rakit langkah demi langkah.</a:t>
-            </a:r>
-          </a:p>
-          <a:p>
-            <a:pPr marL="171450" indent="-171450">
-              <a:spcBef>
+              </a:spcAft>
+            </a:pPr>
+            <a:r>
+              <a:rPr sz="2800" b="1" i="0">
+                <a:solidFill>
+                  <a:srgbClr val="33231C"/>
+                </a:solidFill>
+                <a:latin typeface="Noto Sans"/>
+              </a:rPr>
+              <a:t>16</a:t>
+            </a:r>
+          </a:p>
+          <a:p>
+            <a:pPr>
+              <a:lnSpc>
+                <a:spcPct val="105000"/>
+              </a:lnSpc>
+              <a:spcAft>
+                <a:spcPts val="0"/>
+              </a:spcAft>
+            </a:pPr>
+            <a:r>
+              <a:rPr sz="1100" b="1" i="0">
+                <a:solidFill>
+                  <a:srgbClr val="33231C"/>
+                </a:solidFill>
+                <a:latin typeface="Noto Sans"/>
+              </a:rPr>
+              <a:t>GEMPA M≥7,0 DALAM 12 TAHUN: LANGKA, TANPA JADWAL</a:t>
+            </a:r>
+          </a:p>
+        </p:txBody>
+      </p:sp>
+      <p:sp>
+        <p:nvSpPr>
+          <p:cNvPr id="8" name="Rectangle 7"/>
+          <p:cNvSpPr/>
+          <p:nvPr/>
+        </p:nvSpPr>
+        <p:spPr>
+          <a:xfrm>
+            <a:off x="7973568" y="1463040"/>
+            <a:ext cx="3575304" cy="1188720"/>
+          </a:xfrm>
+          <a:prstGeom prst="rect">
+            <a:avLst/>
+          </a:prstGeom>
+          <a:solidFill>
+            <a:srgbClr val="C97B63"/>
+          </a:solidFill>
+          <a:ln>
+            <a:noFill/>
+          </a:ln>
+          <a:effectLst/>
+        </p:spPr>
+        <p:style>
+          <a:lnRef idx="1">
+            <a:schemeClr val="accent1"/>
+          </a:lnRef>
+          <a:fillRef idx="3">
+            <a:schemeClr val="accent1"/>
+          </a:fillRef>
+          <a:effectRef idx="2">
+            <a:schemeClr val="accent1"/>
+          </a:effectRef>
+          <a:fontRef idx="minor">
+            <a:schemeClr val="lt1"/>
+          </a:fontRef>
+        </p:style>
+        <p:txBody>
+          <a:bodyPr rtlCol="0" anchor="ctr"/>
+          <a:lstStyle/>
+          <a:p>
+            <a:pPr algn="ctr"/>
+          </a:p>
+        </p:txBody>
+      </p:sp>
+      <p:sp>
+        <p:nvSpPr>
+          <p:cNvPr id="9" name="TextBox 8"/>
+          <p:cNvSpPr txBox="1"/>
+          <p:nvPr/>
+        </p:nvSpPr>
+        <p:spPr>
+          <a:xfrm>
+            <a:off x="8202168" y="1591056"/>
+            <a:ext cx="3118104" cy="932688"/>
+          </a:xfrm>
+          <a:prstGeom prst="rect">
+            <a:avLst/>
+          </a:prstGeom>
+          <a:noFill/>
+        </p:spPr>
+        <p:txBody>
+          <a:bodyPr wrap="square">
+            <a:spAutoFit/>
+          </a:bodyPr>
+          <a:lstStyle/>
+          <a:p>
+            <a:pPr>
+              <a:spcAft>
                 <a:spcPts val="200"/>
-              </a:spcBef>
-              <a:spcAft>
-                <a:spcPts val="1000"/>
-              </a:spcAft>
-              <a:buChar char="•"/>
-            </a:pPr>
-            <a:r>
-              <a:rPr sz="1700" b="0" i="0">
-                <a:solidFill>
-                  <a:srgbClr val="1F2937"/>
-                </a:solidFill>
-              </a:rPr>
-              <a:t>Semua angka dapat direproduksi: jalankan scripts/fetch_data.py lalu scripts/analyze.py — findings.json dan 12 chart dihitung ulang dari nol, dan bisa dicek silang dengan sql/queries.sql.</a:t>
-            </a:r>
-          </a:p>
-          <a:p>
-            <a:pPr marL="171450" indent="-171450">
-              <a:spcBef>
-                <a:spcPts val="200"/>
-              </a:spcBef>
-              <a:spcAft>
-                <a:spcPts val="1000"/>
-              </a:spcAft>
-              <a:buChar char="•"/>
-            </a:pPr>
-            <a:r>
-              <a:rPr sz="1700" b="0" i="0">
-                <a:solidFill>
-                  <a:srgbClr val="1F2937"/>
-                </a:solidFill>
-              </a:rPr>
-              <a:t>Terima kasih.</a:t>
-            </a:r>
+              </a:spcAft>
+            </a:pPr>
+            <a:r>
+              <a:rPr sz="2800" b="1" i="0">
+                <a:solidFill>
+                  <a:srgbClr val="33231C"/>
+                </a:solidFill>
+                <a:latin typeface="Noto Sans"/>
+              </a:rPr>
+              <a:t>2.061</a:t>
+            </a:r>
+          </a:p>
+          <a:p>
+            <a:pPr>
+              <a:lnSpc>
+                <a:spcPct val="105000"/>
+              </a:lnSpc>
+              <a:spcAft>
+                <a:spcPts val="0"/>
+              </a:spcAft>
+            </a:pPr>
+            <a:r>
+              <a:rPr sz="1100" b="1" i="0">
+                <a:solidFill>
+                  <a:srgbClr val="33231C"/>
+                </a:solidFill>
+                <a:latin typeface="Noto Sans"/>
+              </a:rPr>
+              <a:t>KEJADIAN DI HALMAHERA DAN MALUKU UTARA, WILAYAH TERAKTIF</a:t>
+            </a:r>
+          </a:p>
+        </p:txBody>
+      </p:sp>
+      <p:sp>
+        <p:nvSpPr>
+          <p:cNvPr id="10" name="TextBox 9"/>
+          <p:cNvSpPr txBox="1"/>
+          <p:nvPr/>
+        </p:nvSpPr>
+        <p:spPr>
+          <a:xfrm>
+            <a:off x="640080" y="3017520"/>
+            <a:ext cx="10908792" cy="914400"/>
+          </a:xfrm>
+          <a:prstGeom prst="rect">
+            <a:avLst/>
+          </a:prstGeom>
+          <a:noFill/>
+        </p:spPr>
+        <p:txBody>
+          <a:bodyPr wrap="square">
+            <a:spAutoFit/>
+          </a:bodyPr>
+          <a:lstStyle/>
+          <a:p>
+            <a:pPr>
+              <a:spcAft>
+                <a:spcPts val="0"/>
+              </a:spcAft>
+            </a:pPr>
+            <a:r>
+              <a:rPr sz="4400" b="1" i="0">
+                <a:solidFill>
+                  <a:srgbClr val="33231C"/>
+                </a:solidFill>
+                <a:latin typeface="Noto Sans"/>
+              </a:rPr>
+              <a:t>TERIMA KASIH</a:t>
+            </a:r>
+          </a:p>
+        </p:txBody>
+      </p:sp>
+      <p:sp>
+        <p:nvSpPr>
+          <p:cNvPr id="11" name="TextBox 10"/>
+          <p:cNvSpPr txBox="1"/>
+          <p:nvPr/>
+        </p:nvSpPr>
+        <p:spPr>
+          <a:xfrm>
+            <a:off x="640080" y="3977639"/>
+            <a:ext cx="10908792" cy="1005840"/>
+          </a:xfrm>
+          <a:prstGeom prst="rect">
+            <a:avLst/>
+          </a:prstGeom>
+          <a:noFill/>
+        </p:spPr>
+        <p:txBody>
+          <a:bodyPr wrap="square">
+            <a:spAutoFit/>
+          </a:bodyPr>
+          <a:lstStyle/>
+          <a:p>
+            <a:pPr>
+              <a:lnSpc>
+                <a:spcPct val="120000"/>
+              </a:lnSpc>
+              <a:spcAft>
+                <a:spcPts val="0"/>
+              </a:spcAft>
+            </a:pPr>
+            <a:r>
+              <a:rPr sz="1350" b="0" i="0">
+                <a:solidFill>
+                  <a:srgbClr val="33231C"/>
+                </a:solidFill>
+                <a:latin typeface="Noto Sans"/>
+              </a:rPr>
+              <a:t>Risiko besar terkonsentrasi di timur: Halmahera-Maluku, Banda, NTT, Sulawesi. Paket dashboard Power BI tersedia di folder powerbi/ (star schema 3 tabel, measure DAX siap tempel dengan tabel verifikasi, layout 4 halaman termasuk halaman peta, dan panduan rakit langkah demi langkah). Semua angka dapat direproduksi: jalankan scripts/fetch_data.py lalu scripts/analyze.py, dan bisa dicek silang dengan sql/queries.sql.</a:t>
+            </a:r>
+          </a:p>
+        </p:txBody>
+      </p:sp>
+      <p:sp>
+        <p:nvSpPr>
+          <p:cNvPr id="12" name="Rectangle 11"/>
+          <p:cNvSpPr/>
+          <p:nvPr/>
+        </p:nvSpPr>
+        <p:spPr>
+          <a:xfrm>
+            <a:off x="640080" y="5257800"/>
+            <a:ext cx="1463040" cy="64008"/>
+          </a:xfrm>
+          <a:prstGeom prst="rect">
+            <a:avLst/>
+          </a:prstGeom>
+          <a:solidFill>
+            <a:srgbClr val="DE7A2D"/>
+          </a:solidFill>
+          <a:ln>
+            <a:noFill/>
+          </a:ln>
+          <a:effectLst/>
+        </p:spPr>
+        <p:style>
+          <a:lnRef idx="1">
+            <a:schemeClr val="accent1"/>
+          </a:lnRef>
+          <a:fillRef idx="3">
+            <a:schemeClr val="accent1"/>
+          </a:fillRef>
+          <a:effectRef idx="2">
+            <a:schemeClr val="accent1"/>
+          </a:effectRef>
+          <a:fontRef idx="minor">
+            <a:schemeClr val="lt1"/>
+          </a:fontRef>
+        </p:style>
+        <p:txBody>
+          <a:bodyPr rtlCol="0" anchor="ctr"/>
+          <a:lstStyle/>
+          <a:p>
+            <a:pPr algn="ctr"/>
+          </a:p>
+        </p:txBody>
+      </p:sp>
+      <p:sp>
+        <p:nvSpPr>
+          <p:cNvPr id="13" name="TextBox 12"/>
+          <p:cNvSpPr txBox="1"/>
+          <p:nvPr/>
+        </p:nvSpPr>
+        <p:spPr>
+          <a:xfrm>
+            <a:off x="640080" y="5440680"/>
+            <a:ext cx="10908792" cy="1097280"/>
+          </a:xfrm>
+          <a:prstGeom prst="rect">
+            <a:avLst/>
+          </a:prstGeom>
+          <a:noFill/>
+        </p:spPr>
+        <p:txBody>
+          <a:bodyPr wrap="square">
+            <a:spAutoFit/>
+          </a:bodyPr>
+          <a:lstStyle/>
+          <a:p>
+            <a:pPr>
+              <a:spcAft>
+                <a:spcPts val="400"/>
+              </a:spcAft>
+            </a:pPr>
+            <a:r>
+              <a:rPr sz="2600" b="1" i="0">
+                <a:solidFill>
+                  <a:srgbClr val="A34A38"/>
+                </a:solidFill>
+                <a:latin typeface="Noto Sans"/>
+              </a:rPr>
+              <a:t>BAGHIZ ASSHIDDIQIE ARASYA</a:t>
+            </a:r>
+          </a:p>
+          <a:p>
+            <a:pPr>
+              <a:spcAft>
+                <a:spcPts val="0"/>
+              </a:spcAft>
+            </a:pPr>
+            <a:r>
+              <a:rPr sz="1500" b="0" i="0">
+                <a:solidFill>
+                  <a:srgbClr val="33231C"/>
+                </a:solidFill>
+                <a:latin typeface="Noto Sans"/>
+              </a:rPr>
+              <a:t>github.com/baghizash/gempa-bumi-indonesia-2026</a:t>
+            </a:r>
+          </a:p>
+        </p:txBody>
+      </p:sp>
+      <p:sp>
+        <p:nvSpPr>
+          <p:cNvPr id="14" name="Rectangle 13"/>
+          <p:cNvSpPr/>
+          <p:nvPr/>
+        </p:nvSpPr>
+        <p:spPr>
+          <a:xfrm>
+            <a:off x="0" y="6748272"/>
+            <a:ext cx="12191695" cy="109728"/>
+          </a:xfrm>
+          <a:prstGeom prst="rect">
+            <a:avLst/>
+          </a:prstGeom>
+          <a:solidFill>
+            <a:srgbClr val="A34A38"/>
+          </a:solidFill>
+          <a:ln>
+            <a:noFill/>
+          </a:ln>
+          <a:effectLst/>
+        </p:spPr>
+        <p:style>
+          <a:lnRef idx="1">
+            <a:schemeClr val="accent1"/>
+          </a:lnRef>
+          <a:fillRef idx="3">
+            <a:schemeClr val="accent1"/>
+          </a:fillRef>
+          <a:effectRef idx="2">
+            <a:schemeClr val="accent1"/>
+          </a:effectRef>
+          <a:fontRef idx="minor">
+            <a:schemeClr val="lt1"/>
+          </a:fontRef>
+        </p:style>
+        <p:txBody>
+          <a:bodyPr rtlCol="0" anchor="ctr"/>
+          <a:lstStyle/>
+          <a:p>
+            <a:pPr algn="ctr"/>
           </a:p>
         </p:txBody>
       </p:sp>
@@ -3492,7 +4350,7 @@
     <p:bg>
       <p:bgPr>
         <a:solidFill>
-          <a:srgbClr val="FFFFFF"/>
+          <a:srgbClr val="F1E9DA"/>
         </a:solidFill>
         <a:effectLst/>
       </p:bgPr>
@@ -3512,8 +4370,8 @@
         </p:nvSpPr>
         <p:spPr>
           <a:xfrm>
-            <a:off x="640080" y="274320"/>
-            <a:ext cx="10881360" cy="822960"/>
+            <a:off x="640080" y="384048"/>
+            <a:ext cx="10908792" cy="777240"/>
           </a:xfrm>
           <a:prstGeom prst="rect">
             <a:avLst/>
@@ -3528,16 +4386,17 @@
           <a:p>
             <a:pPr>
               <a:spcAft>
-                <a:spcPts val="800"/>
-              </a:spcAft>
-            </a:pPr>
-            <a:r>
-              <a:rPr sz="3000" b="1" i="0">
-                <a:solidFill>
-                  <a:srgbClr val="1E3A8A"/>
-                </a:solidFill>
-              </a:rPr>
-              <a:t>Kenapa Gempa Bumi?</a:t>
+                <a:spcPts val="0"/>
+              </a:spcAft>
+            </a:pPr>
+            <a:r>
+              <a:rPr sz="3100" b="1" i="0">
+                <a:solidFill>
+                  <a:srgbClr val="33231C"/>
+                </a:solidFill>
+                <a:latin typeface="Noto Sans"/>
+              </a:rPr>
+              <a:t>KENAPA GEMPA BUMI?</a:t>
             </a:r>
           </a:p>
         </p:txBody>
@@ -3550,18 +4409,19 @@
         </p:nvSpPr>
         <p:spPr>
           <a:xfrm>
-            <a:off x="640080" y="1051560"/>
-            <a:ext cx="1371600" cy="54864"/>
+            <a:off x="658368" y="1188720"/>
+            <a:ext cx="1371600" cy="82296"/>
           </a:xfrm>
           <a:prstGeom prst="rect">
             <a:avLst/>
           </a:prstGeom>
           <a:solidFill>
-            <a:srgbClr val="0E7C7B"/>
+            <a:srgbClr val="A34A38"/>
           </a:solidFill>
           <a:ln>
             <a:noFill/>
           </a:ln>
+          <a:effectLst/>
         </p:spPr>
         <p:style>
           <a:lnRef idx="1">
@@ -3593,8 +4453,8 @@
         </p:nvSpPr>
         <p:spPr>
           <a:xfrm>
-            <a:off x="640080" y="1371600"/>
-            <a:ext cx="10881360" cy="4754880"/>
+            <a:off x="640080" y="1463040"/>
+            <a:ext cx="6858000" cy="4480560"/>
           </a:xfrm>
           <a:prstGeom prst="rect">
             <a:avLst/>
@@ -3608,73 +4468,120 @@
           <a:lstStyle/>
           <a:p>
             <a:pPr marL="171450" indent="-171450">
-              <a:spcBef>
-                <a:spcPts val="200"/>
-              </a:spcBef>
+              <a:lnSpc>
+                <a:spcPct val="108000"/>
+              </a:lnSpc>
               <a:spcAft>
                 <a:spcPts val="1000"/>
               </a:spcAft>
               <a:buChar char="•"/>
             </a:pPr>
             <a:r>
-              <a:rPr sz="1700" b="0" i="0">
-                <a:solidFill>
-                  <a:srgbClr val="1F2937"/>
-                </a:solidFill>
-              </a:rPr>
-              <a:t>Indonesia berdiri di pertemuan empat lempeng tektonik: Indo-Australia, Eurasia, Pasifik, dan Laut Filipina. Gempa bukan kejadian langka — ia terjadi hampir setiap hari.</a:t>
+              <a:rPr sz="1600" b="0" i="0">
+                <a:solidFill>
+                  <a:srgbClr val="33231C"/>
+                </a:solidFill>
+                <a:latin typeface="Noto Sans"/>
+              </a:rPr>
+              <a:t>Indonesia berdiri di pertemuan empat lempeng tektonik: Indo-Australia, Eurasia, Pasifik, dan Laut Filipina. Gempa bukan kejadian langka: ia terjadi hampir setiap hari.</a:t>
             </a:r>
           </a:p>
           <a:p>
             <a:pPr marL="171450" indent="-171450">
-              <a:spcBef>
-                <a:spcPts val="200"/>
-              </a:spcBef>
+              <a:lnSpc>
+                <a:spcPct val="108000"/>
+              </a:lnSpc>
               <a:spcAft>
                 <a:spcPts val="1000"/>
               </a:spcAft>
               <a:buChar char="•"/>
             </a:pPr>
             <a:r>
-              <a:rPr sz="1700" b="0" i="0">
-                <a:solidFill>
-                  <a:srgbClr val="1F2937"/>
-                </a:solidFill>
+              <a:rPr sz="1600" b="0" i="0">
+                <a:solidFill>
+                  <a:srgbClr val="33231C"/>
+                </a:solidFill>
+                <a:latin typeface="Noto Sans"/>
               </a:rPr>
               <a:t>Tapi 'sering' saja tidak cukup untuk kebijakan dan kesiapsiagaan. Yang perlu dijawab: wilayah mana paling aktif, seberapa besar gempa yang realistis terjadi, dan seberapa dangkal sumbernya.</a:t>
             </a:r>
           </a:p>
           <a:p>
             <a:pPr marL="171450" indent="-171450">
-              <a:spcBef>
-                <a:spcPts val="200"/>
-              </a:spcBef>
+              <a:lnSpc>
+                <a:spcPct val="108000"/>
+              </a:lnSpc>
               <a:spcAft>
                 <a:spcPts val="1000"/>
               </a:spcAft>
               <a:buChar char="•"/>
             </a:pPr>
             <a:r>
-              <a:rPr sz="1700" b="0" i="0">
-                <a:solidFill>
-                  <a:srgbClr val="1F2937"/>
-                </a:solidFill>
-              </a:rPr>
-              <a:t>Analisis ini menjawabnya dari katalog 12 tahun: frekuensi per tahun, kelas magnitudo, kelas kedalaman, peta sebaran, sampai gempa berflag tsunami — ditutup snapshot kejadian terbaru dari BMKG.</a:t>
-            </a:r>
-          </a:p>
-        </p:txBody>
-      </p:sp>
-      <p:sp>
-        <p:nvSpPr>
-          <p:cNvPr id="5" name="TextBox 4"/>
+              <a:rPr sz="1600" b="0" i="0">
+                <a:solidFill>
+                  <a:srgbClr val="33231C"/>
+                </a:solidFill>
+                <a:latin typeface="Noto Sans"/>
+              </a:rPr>
+              <a:t>Analisis ini menjawabnya dari katalog 12 tahun: frekuensi per tahun, kelas magnitudo, kelas kedalaman, peta sebaran, sampai gempa berflag tsunami, ditutup snapshot kejadian terbaru dari BMKG.</a:t>
+            </a:r>
+          </a:p>
+        </p:txBody>
+      </p:sp>
+      <p:sp>
+        <p:nvSpPr>
+          <p:cNvPr id="5" name="Rectangle 4"/>
+          <p:cNvSpPr/>
+          <p:nvPr/>
+        </p:nvSpPr>
+        <p:spPr>
+          <a:xfrm>
+            <a:off x="7863840" y="1463040"/>
+            <a:ext cx="3657600" cy="2011680"/>
+          </a:xfrm>
+          <a:prstGeom prst="rect">
+            <a:avLst/>
+          </a:prstGeom>
+          <a:solidFill>
+            <a:srgbClr val="A34A38"/>
+          </a:solidFill>
+          <a:ln>
+            <a:noFill/>
+          </a:ln>
+          <a:effectLst/>
+        </p:spPr>
+        <p:style>
+          <a:lnRef idx="1">
+            <a:schemeClr val="accent1"/>
+          </a:lnRef>
+          <a:fillRef idx="3">
+            <a:schemeClr val="accent1"/>
+          </a:fillRef>
+          <a:effectRef idx="2">
+            <a:schemeClr val="accent1"/>
+          </a:effectRef>
+          <a:fontRef idx="minor">
+            <a:schemeClr val="lt1"/>
+          </a:fontRef>
+        </p:style>
+        <p:txBody>
+          <a:bodyPr rtlCol="0" anchor="ctr"/>
+          <a:lstStyle/>
+          <a:p>
+            <a:pPr algn="ctr"/>
+          </a:p>
+        </p:txBody>
+      </p:sp>
+      <p:sp>
+        <p:nvSpPr>
+          <p:cNvPr id="6" name="TextBox 5"/>
           <p:cNvSpPr txBox="1"/>
           <p:nvPr/>
         </p:nvSpPr>
         <p:spPr>
           <a:xfrm>
-            <a:off x="640080" y="6126480"/>
-            <a:ext cx="10881360" cy="457200"/>
+            <a:off x="8092440" y="1591056"/>
+            <a:ext cx="3200400" cy="1755648"/>
           </a:xfrm>
           <a:prstGeom prst="rect">
             <a:avLst/>
@@ -3689,17 +4596,222 @@
           <a:p>
             <a:pPr>
               <a:spcAft>
-                <a:spcPts val="800"/>
+                <a:spcPts val="200"/>
+              </a:spcAft>
+            </a:pPr>
+            <a:r>
+              <a:rPr sz="5400" b="1" i="0">
+                <a:solidFill>
+                  <a:srgbClr val="FFFFFF"/>
+                </a:solidFill>
+                <a:latin typeface="Noto Sans"/>
+              </a:rPr>
+              <a:t>4</a:t>
+            </a:r>
+          </a:p>
+          <a:p>
+            <a:pPr>
+              <a:lnSpc>
+                <a:spcPct val="105000"/>
+              </a:lnSpc>
+              <a:spcAft>
+                <a:spcPts val="0"/>
+              </a:spcAft>
+            </a:pPr>
+            <a:r>
+              <a:rPr sz="1100" b="1" i="0">
+                <a:solidFill>
+                  <a:srgbClr val="FFFFFF"/>
+                </a:solidFill>
+                <a:latin typeface="Noto Sans"/>
+              </a:rPr>
+              <a:t>LEMPENG TEKTONIK BERTEMU DI INDONESIA</a:t>
+            </a:r>
+          </a:p>
+        </p:txBody>
+      </p:sp>
+      <p:sp>
+        <p:nvSpPr>
+          <p:cNvPr id="7" name="Rectangle 6"/>
+          <p:cNvSpPr/>
+          <p:nvPr/>
+        </p:nvSpPr>
+        <p:spPr>
+          <a:xfrm>
+            <a:off x="7863840" y="3657600"/>
+            <a:ext cx="3657600" cy="2011680"/>
+          </a:xfrm>
+          <a:prstGeom prst="rect">
+            <a:avLst/>
+          </a:prstGeom>
+          <a:solidFill>
+            <a:srgbClr val="DE7A2D"/>
+          </a:solidFill>
+          <a:ln>
+            <a:noFill/>
+          </a:ln>
+          <a:effectLst/>
+        </p:spPr>
+        <p:style>
+          <a:lnRef idx="1">
+            <a:schemeClr val="accent1"/>
+          </a:lnRef>
+          <a:fillRef idx="3">
+            <a:schemeClr val="accent1"/>
+          </a:fillRef>
+          <a:effectRef idx="2">
+            <a:schemeClr val="accent1"/>
+          </a:effectRef>
+          <a:fontRef idx="minor">
+            <a:schemeClr val="lt1"/>
+          </a:fontRef>
+        </p:style>
+        <p:txBody>
+          <a:bodyPr rtlCol="0" anchor="ctr"/>
+          <a:lstStyle/>
+          <a:p>
+            <a:pPr algn="ctr"/>
+          </a:p>
+        </p:txBody>
+      </p:sp>
+      <p:sp>
+        <p:nvSpPr>
+          <p:cNvPr id="8" name="TextBox 7"/>
+          <p:cNvSpPr txBox="1"/>
+          <p:nvPr/>
+        </p:nvSpPr>
+        <p:spPr>
+          <a:xfrm>
+            <a:off x="8092440" y="3785615"/>
+            <a:ext cx="3200400" cy="1755648"/>
+          </a:xfrm>
+          <a:prstGeom prst="rect">
+            <a:avLst/>
+          </a:prstGeom>
+          <a:noFill/>
+        </p:spPr>
+        <p:txBody>
+          <a:bodyPr wrap="square">
+            <a:spAutoFit/>
+          </a:bodyPr>
+          <a:lstStyle/>
+          <a:p>
+            <a:pPr>
+              <a:spcAft>
+                <a:spcPts val="200"/>
+              </a:spcAft>
+            </a:pPr>
+            <a:r>
+              <a:rPr sz="5400" b="1" i="0">
+                <a:solidFill>
+                  <a:srgbClr val="33231C"/>
+                </a:solidFill>
+                <a:latin typeface="Noto Sans"/>
+              </a:rPr>
+              <a:t>12</a:t>
+            </a:r>
+          </a:p>
+          <a:p>
+            <a:pPr>
+              <a:lnSpc>
+                <a:spcPct val="105000"/>
+              </a:lnSpc>
+              <a:spcAft>
+                <a:spcPts val="0"/>
+              </a:spcAft>
+            </a:pPr>
+            <a:r>
+              <a:rPr sz="1100" b="1" i="0">
+                <a:solidFill>
+                  <a:srgbClr val="33231C"/>
+                </a:solidFill>
+                <a:latin typeface="Noto Sans"/>
+              </a:rPr>
+              <a:t>TAHUN KATALOG USGS: 2015-2026</a:t>
+            </a:r>
+          </a:p>
+        </p:txBody>
+      </p:sp>
+      <p:sp>
+        <p:nvSpPr>
+          <p:cNvPr id="9" name="TextBox 8"/>
+          <p:cNvSpPr txBox="1"/>
+          <p:nvPr/>
+        </p:nvSpPr>
+        <p:spPr>
+          <a:xfrm>
+            <a:off x="640080" y="6291072"/>
+            <a:ext cx="10908792" cy="365760"/>
+          </a:xfrm>
+          <a:prstGeom prst="rect">
+            <a:avLst/>
+          </a:prstGeom>
+          <a:noFill/>
+        </p:spPr>
+        <p:txBody>
+          <a:bodyPr wrap="square">
+            <a:spAutoFit/>
+          </a:bodyPr>
+          <a:lstStyle/>
+          <a:p>
+            <a:pPr>
+              <a:spcAft>
+                <a:spcPts val="0"/>
               </a:spcAft>
             </a:pPr>
             <a:r>
               <a:rPr sz="1100" b="0" i="1">
                 <a:solidFill>
-                  <a:srgbClr val="6B7280"/>
-                </a:solidFill>
+                  <a:srgbClr val="8A7A6C"/>
+                </a:solidFill>
+                <a:latin typeface="Noto Sans"/>
               </a:rPr>
               <a:t>Sumber data: USGS FDSN Event API (katalog historis) dan BMKG TEWS (snapshot real-time), diambil 20 Oktober 2026.</a:t>
             </a:r>
+          </a:p>
+        </p:txBody>
+      </p:sp>
+      <p:sp>
+        <p:nvSpPr>
+          <p:cNvPr id="10" name="Rectangle 9"/>
+          <p:cNvSpPr/>
+          <p:nvPr/>
+        </p:nvSpPr>
+        <p:spPr>
+          <a:xfrm>
+            <a:off x="0" y="6748272"/>
+            <a:ext cx="12191695" cy="109728"/>
+          </a:xfrm>
+          <a:prstGeom prst="rect">
+            <a:avLst/>
+          </a:prstGeom>
+          <a:solidFill>
+            <a:srgbClr val="A34A38"/>
+          </a:solidFill>
+          <a:ln>
+            <a:noFill/>
+          </a:ln>
+          <a:effectLst/>
+        </p:spPr>
+        <p:style>
+          <a:lnRef idx="1">
+            <a:schemeClr val="accent1"/>
+          </a:lnRef>
+          <a:fillRef idx="3">
+            <a:schemeClr val="accent1"/>
+          </a:fillRef>
+          <a:effectRef idx="2">
+            <a:schemeClr val="accent1"/>
+          </a:effectRef>
+          <a:fontRef idx="minor">
+            <a:schemeClr val="lt1"/>
+          </a:fontRef>
+        </p:style>
+        <p:txBody>
+          <a:bodyPr rtlCol="0" anchor="ctr"/>
+          <a:lstStyle/>
+          <a:p>
+            <a:pPr algn="ctr"/>
           </a:p>
         </p:txBody>
       </p:sp>
@@ -3717,7 +4829,7 @@
     <p:bg>
       <p:bgPr>
         <a:solidFill>
-          <a:srgbClr val="FFFFFF"/>
+          <a:srgbClr val="F1E9DA"/>
         </a:solidFill>
         <a:effectLst/>
       </p:bgPr>
@@ -3737,8 +4849,8 @@
         </p:nvSpPr>
         <p:spPr>
           <a:xfrm>
-            <a:off x="640080" y="274320"/>
-            <a:ext cx="10881360" cy="822960"/>
+            <a:off x="640080" y="384048"/>
+            <a:ext cx="10908792" cy="777240"/>
           </a:xfrm>
           <a:prstGeom prst="rect">
             <a:avLst/>
@@ -3753,16 +4865,17 @@
           <a:p>
             <a:pPr>
               <a:spcAft>
-                <a:spcPts val="800"/>
-              </a:spcAft>
-            </a:pPr>
-            <a:r>
-              <a:rPr sz="3000" b="1" i="0">
-                <a:solidFill>
-                  <a:srgbClr val="1E3A8A"/>
-                </a:solidFill>
-              </a:rPr>
-              <a:t>Data dan Metode</a:t>
+                <a:spcPts val="0"/>
+              </a:spcAft>
+            </a:pPr>
+            <a:r>
+              <a:rPr sz="3100" b="1" i="0">
+                <a:solidFill>
+                  <a:srgbClr val="33231C"/>
+                </a:solidFill>
+                <a:latin typeface="Noto Sans"/>
+              </a:rPr>
+              <a:t>DATA DAN METODE</a:t>
             </a:r>
           </a:p>
         </p:txBody>
@@ -3775,18 +4888,19 @@
         </p:nvSpPr>
         <p:spPr>
           <a:xfrm>
-            <a:off x="640080" y="1051560"/>
-            <a:ext cx="1371600" cy="54864"/>
+            <a:off x="658368" y="1188720"/>
+            <a:ext cx="1371600" cy="82296"/>
           </a:xfrm>
           <a:prstGeom prst="rect">
             <a:avLst/>
           </a:prstGeom>
           <a:solidFill>
-            <a:srgbClr val="0E7C7B"/>
+            <a:srgbClr val="DE7A2D"/>
           </a:solidFill>
           <a:ln>
             <a:noFill/>
           </a:ln>
+          <a:effectLst/>
         </p:spPr>
         <p:style>
           <a:lnRef idx="1">
@@ -3818,8 +4932,8 @@
         </p:nvSpPr>
         <p:spPr>
           <a:xfrm>
-            <a:off x="640080" y="1371600"/>
-            <a:ext cx="10881360" cy="4754880"/>
+            <a:off x="640080" y="1463040"/>
+            <a:ext cx="10908792" cy="3474720"/>
           </a:xfrm>
           <a:prstGeom prst="rect">
             <a:avLst/>
@@ -3833,79 +4947,433 @@
           <a:lstStyle/>
           <a:p>
             <a:pPr marL="171450" indent="-171450">
-              <a:spcBef>
+              <a:lnSpc>
+                <a:spcPct val="108000"/>
+              </a:lnSpc>
+              <a:spcAft>
+                <a:spcPts val="1000"/>
+              </a:spcAft>
+              <a:buChar char="•"/>
+            </a:pPr>
+            <a:r>
+              <a:rPr sz="1600" b="0" i="0">
+                <a:solidFill>
+                  <a:srgbClr val="33231C"/>
+                </a:solidFill>
+                <a:latin typeface="Noto Sans"/>
+              </a:rPr>
+              <a:t>Katalog mentah USGS: 10.841 kejadian dalam kotak batas Indonesia (lintang -11 s.d. 6, bujur 95 s.d. 141), ambang M≥4,5. Setelah 1.246 kejadian berlabel negara lain (Filipina, Malaysia, Papua Nugini, Palau) dikeluarkan, katalog bersih berisi 9.595 kejadian.</a:t>
+            </a:r>
+          </a:p>
+          <a:p>
+            <a:pPr marL="171450" indent="-171450">
+              <a:lnSpc>
+                <a:spcPct val="108000"/>
+              </a:lnSpc>
+              <a:spcAft>
+                <a:spcPts val="1000"/>
+              </a:spcAft>
+              <a:buChar char="•"/>
+            </a:pPr>
+            <a:r>
+              <a:rPr sz="1600" b="0" i="0">
+                <a:solidFill>
+                  <a:srgbClr val="33231C"/>
+                </a:solidFill>
+                <a:latin typeface="Noto Sans"/>
+              </a:rPr>
+              <a:t>670 kejadian berlabel 'Timor Leste' dipertahankan: episentrumnya di perairan Indonesia utara/timur Pulau Timor, hanya kota acuannya yang lintas negara.</a:t>
+            </a:r>
+          </a:p>
+          <a:p>
+            <a:pPr marL="171450" indent="-171450">
+              <a:lnSpc>
+                <a:spcPct val="108000"/>
+              </a:lnSpc>
+              <a:spcAft>
+                <a:spcPts val="1000"/>
+              </a:spcAft>
+              <a:buChar char="•"/>
+            </a:pPr>
+            <a:r>
+              <a:rPr sz="1600" b="0" i="0">
+                <a:solidFill>
+                  <a:srgbClr val="33231C"/>
+                </a:solidFill>
+                <a:latin typeface="Noto Sans"/>
+              </a:rPr>
+              <a:t>Wilayah diturunkan dari nama laut pada label USGS, lalu kotak koordinat pulau terdekat. Kelas kedalaman: dangkal &lt;70 km, menengah 70-300 km, dalam &gt;300 km.</a:t>
+            </a:r>
+          </a:p>
+          <a:p>
+            <a:pPr marL="171450" indent="-171450">
+              <a:lnSpc>
+                <a:spcPct val="108000"/>
+              </a:lnSpc>
+              <a:spcAft>
+                <a:spcPts val="1000"/>
+              </a:spcAft>
+              <a:buChar char="•"/>
+            </a:pPr>
+            <a:r>
+              <a:rPr sz="1600" b="0" i="0">
+                <a:solidFill>
+                  <a:srgbClr val="33231C"/>
+                </a:solidFill>
+                <a:latin typeface="Noto Sans"/>
+              </a:rPr>
+              <a:t>Snapshot BMKG (autogempa, gempaterkini, gempadirasakan) dipakai untuk bagian terkini: endpoint itu hanya menyimpan kejadian terbaru, bukan arsip.</a:t>
+            </a:r>
+          </a:p>
+        </p:txBody>
+      </p:sp>
+      <p:sp>
+        <p:nvSpPr>
+          <p:cNvPr id="5" name="Rectangle 4"/>
+          <p:cNvSpPr/>
+          <p:nvPr/>
+        </p:nvSpPr>
+        <p:spPr>
+          <a:xfrm>
+            <a:off x="640080" y="5074920"/>
+            <a:ext cx="3575304" cy="1188720"/>
+          </a:xfrm>
+          <a:prstGeom prst="rect">
+            <a:avLst/>
+          </a:prstGeom>
+          <a:solidFill>
+            <a:srgbClr val="F8F2E5"/>
+          </a:solidFill>
+          <a:ln>
+            <a:noFill/>
+          </a:ln>
+          <a:effectLst/>
+        </p:spPr>
+        <p:style>
+          <a:lnRef idx="1">
+            <a:schemeClr val="accent1"/>
+          </a:lnRef>
+          <a:fillRef idx="3">
+            <a:schemeClr val="accent1"/>
+          </a:fillRef>
+          <a:effectRef idx="2">
+            <a:schemeClr val="accent1"/>
+          </a:effectRef>
+          <a:fontRef idx="minor">
+            <a:schemeClr val="lt1"/>
+          </a:fontRef>
+        </p:style>
+        <p:txBody>
+          <a:bodyPr rtlCol="0" anchor="ctr"/>
+          <a:lstStyle/>
+          <a:p>
+            <a:pPr algn="ctr"/>
+          </a:p>
+        </p:txBody>
+      </p:sp>
+      <p:sp>
+        <p:nvSpPr>
+          <p:cNvPr id="6" name="TextBox 5"/>
+          <p:cNvSpPr txBox="1"/>
+          <p:nvPr/>
+        </p:nvSpPr>
+        <p:spPr>
+          <a:xfrm>
+            <a:off x="868680" y="5202936"/>
+            <a:ext cx="3118104" cy="932688"/>
+          </a:xfrm>
+          <a:prstGeom prst="rect">
+            <a:avLst/>
+          </a:prstGeom>
+          <a:noFill/>
+        </p:spPr>
+        <p:txBody>
+          <a:bodyPr wrap="square">
+            <a:spAutoFit/>
+          </a:bodyPr>
+          <a:lstStyle/>
+          <a:p>
+            <a:pPr>
+              <a:spcAft>
                 <a:spcPts val="200"/>
-              </a:spcBef>
-              <a:spcAft>
-                <a:spcPts val="1000"/>
-              </a:spcAft>
-              <a:buChar char="•"/>
-            </a:pPr>
-            <a:r>
-              <a:rPr sz="1700" b="0" i="0">
-                <a:solidFill>
-                  <a:srgbClr val="1F2937"/>
-                </a:solidFill>
-              </a:rPr>
-              <a:t>Katalog mentah USGS: 10.841 kejadian dalam kotak batas Indonesia (lintang −11 s.d. 6, bujur 95 s.d. 141), ambang M≥4,5. Setelah 1.246 kejadian berlabel negara lain (Filipina, Malaysia, Papua Nugini, Palau) dikeluarkan, katalog bersih berisi 9.595 kejadian.</a:t>
-            </a:r>
-          </a:p>
-          <a:p>
-            <a:pPr marL="171450" indent="-171450">
-              <a:spcBef>
+              </a:spcAft>
+            </a:pPr>
+            <a:r>
+              <a:rPr sz="3000" b="1" i="0">
+                <a:solidFill>
+                  <a:srgbClr val="33231C"/>
+                </a:solidFill>
+                <a:latin typeface="Noto Sans"/>
+              </a:rPr>
+              <a:t>10.841</a:t>
+            </a:r>
+          </a:p>
+          <a:p>
+            <a:pPr>
+              <a:lnSpc>
+                <a:spcPct val="105000"/>
+              </a:lnSpc>
+              <a:spcAft>
+                <a:spcPts val="0"/>
+              </a:spcAft>
+            </a:pPr>
+            <a:r>
+              <a:rPr sz="1100" b="1" i="0">
+                <a:solidFill>
+                  <a:srgbClr val="33231C"/>
+                </a:solidFill>
+                <a:latin typeface="Noto Sans"/>
+              </a:rPr>
+              <a:t>KEJADIAN MENTAH DALAM KOTAK BATAS INDONESIA</a:t>
+            </a:r>
+          </a:p>
+        </p:txBody>
+      </p:sp>
+      <p:sp>
+        <p:nvSpPr>
+          <p:cNvPr id="7" name="Rectangle 6"/>
+          <p:cNvSpPr/>
+          <p:nvPr/>
+        </p:nvSpPr>
+        <p:spPr>
+          <a:xfrm>
+            <a:off x="4306824" y="5074920"/>
+            <a:ext cx="3575304" cy="1188720"/>
+          </a:xfrm>
+          <a:prstGeom prst="rect">
+            <a:avLst/>
+          </a:prstGeom>
+          <a:solidFill>
+            <a:srgbClr val="DE7A2D"/>
+          </a:solidFill>
+          <a:ln>
+            <a:noFill/>
+          </a:ln>
+          <a:effectLst/>
+        </p:spPr>
+        <p:style>
+          <a:lnRef idx="1">
+            <a:schemeClr val="accent1"/>
+          </a:lnRef>
+          <a:fillRef idx="3">
+            <a:schemeClr val="accent1"/>
+          </a:fillRef>
+          <a:effectRef idx="2">
+            <a:schemeClr val="accent1"/>
+          </a:effectRef>
+          <a:fontRef idx="minor">
+            <a:schemeClr val="lt1"/>
+          </a:fontRef>
+        </p:style>
+        <p:txBody>
+          <a:bodyPr rtlCol="0" anchor="ctr"/>
+          <a:lstStyle/>
+          <a:p>
+            <a:pPr algn="ctr"/>
+          </a:p>
+        </p:txBody>
+      </p:sp>
+      <p:sp>
+        <p:nvSpPr>
+          <p:cNvPr id="8" name="TextBox 7"/>
+          <p:cNvSpPr txBox="1"/>
+          <p:nvPr/>
+        </p:nvSpPr>
+        <p:spPr>
+          <a:xfrm>
+            <a:off x="4535424" y="5202936"/>
+            <a:ext cx="3118104" cy="932688"/>
+          </a:xfrm>
+          <a:prstGeom prst="rect">
+            <a:avLst/>
+          </a:prstGeom>
+          <a:noFill/>
+        </p:spPr>
+        <p:txBody>
+          <a:bodyPr wrap="square">
+            <a:spAutoFit/>
+          </a:bodyPr>
+          <a:lstStyle/>
+          <a:p>
+            <a:pPr>
+              <a:spcAft>
                 <a:spcPts val="200"/>
-              </a:spcBef>
-              <a:spcAft>
-                <a:spcPts val="1000"/>
-              </a:spcAft>
-              <a:buChar char="•"/>
-            </a:pPr>
-            <a:r>
-              <a:rPr sz="1700" b="0" i="0">
-                <a:solidFill>
-                  <a:srgbClr val="1F2937"/>
-                </a:solidFill>
-              </a:rPr>
-              <a:t>670 kejadian berlabel 'Timor Leste' dipertahankan: episentrumnya di perairan Indonesia utara/timur Pulau Timor, hanya kota acuannya yang lintas negara.</a:t>
-            </a:r>
-          </a:p>
-          <a:p>
-            <a:pPr marL="171450" indent="-171450">
-              <a:spcBef>
+              </a:spcAft>
+            </a:pPr>
+            <a:r>
+              <a:rPr sz="3000" b="1" i="0">
+                <a:solidFill>
+                  <a:srgbClr val="33231C"/>
+                </a:solidFill>
+                <a:latin typeface="Noto Sans"/>
+              </a:rPr>
+              <a:t>1.246</a:t>
+            </a:r>
+          </a:p>
+          <a:p>
+            <a:pPr>
+              <a:lnSpc>
+                <a:spcPct val="105000"/>
+              </a:lnSpc>
+              <a:spcAft>
+                <a:spcPts val="0"/>
+              </a:spcAft>
+            </a:pPr>
+            <a:r>
+              <a:rPr sz="1100" b="1" i="0">
+                <a:solidFill>
+                  <a:srgbClr val="33231C"/>
+                </a:solidFill>
+                <a:latin typeface="Noto Sans"/>
+              </a:rPr>
+              <a:t>DIKELUARKAN: BERLABEL NEGARA LAIN</a:t>
+            </a:r>
+          </a:p>
+        </p:txBody>
+      </p:sp>
+      <p:sp>
+        <p:nvSpPr>
+          <p:cNvPr id="9" name="Rectangle 8"/>
+          <p:cNvSpPr/>
+          <p:nvPr/>
+        </p:nvSpPr>
+        <p:spPr>
+          <a:xfrm>
+            <a:off x="7973568" y="5074920"/>
+            <a:ext cx="3575304" cy="1188720"/>
+          </a:xfrm>
+          <a:prstGeom prst="rect">
+            <a:avLst/>
+          </a:prstGeom>
+          <a:solidFill>
+            <a:srgbClr val="A34A38"/>
+          </a:solidFill>
+          <a:ln>
+            <a:noFill/>
+          </a:ln>
+          <a:effectLst/>
+        </p:spPr>
+        <p:style>
+          <a:lnRef idx="1">
+            <a:schemeClr val="accent1"/>
+          </a:lnRef>
+          <a:fillRef idx="3">
+            <a:schemeClr val="accent1"/>
+          </a:fillRef>
+          <a:effectRef idx="2">
+            <a:schemeClr val="accent1"/>
+          </a:effectRef>
+          <a:fontRef idx="minor">
+            <a:schemeClr val="lt1"/>
+          </a:fontRef>
+        </p:style>
+        <p:txBody>
+          <a:bodyPr rtlCol="0" anchor="ctr"/>
+          <a:lstStyle/>
+          <a:p>
+            <a:pPr algn="ctr"/>
+          </a:p>
+        </p:txBody>
+      </p:sp>
+      <p:sp>
+        <p:nvSpPr>
+          <p:cNvPr id="10" name="TextBox 9"/>
+          <p:cNvSpPr txBox="1"/>
+          <p:nvPr/>
+        </p:nvSpPr>
+        <p:spPr>
+          <a:xfrm>
+            <a:off x="8202168" y="5202936"/>
+            <a:ext cx="3118104" cy="932688"/>
+          </a:xfrm>
+          <a:prstGeom prst="rect">
+            <a:avLst/>
+          </a:prstGeom>
+          <a:noFill/>
+        </p:spPr>
+        <p:txBody>
+          <a:bodyPr wrap="square">
+            <a:spAutoFit/>
+          </a:bodyPr>
+          <a:lstStyle/>
+          <a:p>
+            <a:pPr>
+              <a:spcAft>
                 <a:spcPts val="200"/>
-              </a:spcBef>
-              <a:spcAft>
-                <a:spcPts val="1000"/>
-              </a:spcAft>
-              <a:buChar char="•"/>
-            </a:pPr>
-            <a:r>
-              <a:rPr sz="1700" b="0" i="0">
-                <a:solidFill>
-                  <a:srgbClr val="1F2937"/>
-                </a:solidFill>
-              </a:rPr>
-              <a:t>Wilayah diturunkan dari nama laut pada label USGS, lalu kotak koordinat pulau terdekat. Kelas kedalaman: dangkal &lt;70 km, menengah 70–300 km, dalam &gt;300 km.</a:t>
-            </a:r>
-          </a:p>
-          <a:p>
-            <a:pPr marL="171450" indent="-171450">
-              <a:spcBef>
-                <a:spcPts val="200"/>
-              </a:spcBef>
-              <a:spcAft>
-                <a:spcPts val="1000"/>
-              </a:spcAft>
-              <a:buChar char="•"/>
-            </a:pPr>
-            <a:r>
-              <a:rPr sz="1700" b="0" i="0">
-                <a:solidFill>
-                  <a:srgbClr val="1F2937"/>
-                </a:solidFill>
-              </a:rPr>
-              <a:t>Snapshot BMKG (autogempa, gempaterkini, gempadirasakan) dipakai untuk bagian terkini — endpoint itu hanya menyimpan kejadian terbaru, bukan arsip.</a:t>
-            </a:r>
+              </a:spcAft>
+            </a:pPr>
+            <a:r>
+              <a:rPr sz="3000" b="1" i="0">
+                <a:solidFill>
+                  <a:srgbClr val="FFFFFF"/>
+                </a:solidFill>
+                <a:latin typeface="Noto Sans"/>
+              </a:rPr>
+              <a:t>9.595</a:t>
+            </a:r>
+          </a:p>
+          <a:p>
+            <a:pPr>
+              <a:lnSpc>
+                <a:spcPct val="105000"/>
+              </a:lnSpc>
+              <a:spcAft>
+                <a:spcPts val="0"/>
+              </a:spcAft>
+            </a:pPr>
+            <a:r>
+              <a:rPr sz="1100" b="1" i="0">
+                <a:solidFill>
+                  <a:srgbClr val="FFFFFF"/>
+                </a:solidFill>
+                <a:latin typeface="Noto Sans"/>
+              </a:rPr>
+              <a:t>KEJADIAN BERSIH DIANALISIS</a:t>
+            </a:r>
+          </a:p>
+        </p:txBody>
+      </p:sp>
+      <p:sp>
+        <p:nvSpPr>
+          <p:cNvPr id="11" name="Rectangle 10"/>
+          <p:cNvSpPr/>
+          <p:nvPr/>
+        </p:nvSpPr>
+        <p:spPr>
+          <a:xfrm>
+            <a:off x="0" y="6748272"/>
+            <a:ext cx="12191695" cy="109728"/>
+          </a:xfrm>
+          <a:prstGeom prst="rect">
+            <a:avLst/>
+          </a:prstGeom>
+          <a:solidFill>
+            <a:srgbClr val="A34A38"/>
+          </a:solidFill>
+          <a:ln>
+            <a:noFill/>
+          </a:ln>
+          <a:effectLst/>
+        </p:spPr>
+        <p:style>
+          <a:lnRef idx="1">
+            <a:schemeClr val="accent1"/>
+          </a:lnRef>
+          <a:fillRef idx="3">
+            <a:schemeClr val="accent1"/>
+          </a:fillRef>
+          <a:effectRef idx="2">
+            <a:schemeClr val="accent1"/>
+          </a:effectRef>
+          <a:fontRef idx="minor">
+            <a:schemeClr val="lt1"/>
+          </a:fontRef>
+        </p:style>
+        <p:txBody>
+          <a:bodyPr rtlCol="0" anchor="ctr"/>
+          <a:lstStyle/>
+          <a:p>
+            <a:pPr algn="ctr"/>
           </a:p>
         </p:txBody>
       </p:sp>
@@ -3923,7 +5391,7 @@
     <p:bg>
       <p:bgPr>
         <a:solidFill>
-          <a:srgbClr val="FFFFFF"/>
+          <a:srgbClr val="F1E9DA"/>
         </a:solidFill>
         <a:effectLst/>
       </p:bgPr>
@@ -3943,8 +5411,8 @@
         </p:nvSpPr>
         <p:spPr>
           <a:xfrm>
-            <a:off x="640080" y="274320"/>
-            <a:ext cx="10881360" cy="822960"/>
+            <a:off x="640080" y="384048"/>
+            <a:ext cx="10908792" cy="777240"/>
           </a:xfrm>
           <a:prstGeom prst="rect">
             <a:avLst/>
@@ -3959,16 +5427,17 @@
           <a:p>
             <a:pPr>
               <a:spcAft>
-                <a:spcPts val="800"/>
-              </a:spcAft>
-            </a:pPr>
-            <a:r>
-              <a:rPr sz="3000" b="1" i="0">
-                <a:solidFill>
-                  <a:srgbClr val="1E3A8A"/>
-                </a:solidFill>
-              </a:rPr>
-              <a:t>Frekuensi: Hampir 800 Gempa per Tahun</a:t>
+                <a:spcPts val="0"/>
+              </a:spcAft>
+            </a:pPr>
+            <a:r>
+              <a:rPr sz="3100" b="1" i="0">
+                <a:solidFill>
+                  <a:srgbClr val="33231C"/>
+                </a:solidFill>
+                <a:latin typeface="Noto Sans"/>
+              </a:rPr>
+              <a:t>FREKUENSI: HAMPIR 800 GEMPA PER TAHUN</a:t>
             </a:r>
           </a:p>
         </p:txBody>
@@ -3981,18 +5450,19 @@
         </p:nvSpPr>
         <p:spPr>
           <a:xfrm>
-            <a:off x="640080" y="1051560"/>
-            <a:ext cx="1371600" cy="54864"/>
+            <a:off x="658368" y="1188720"/>
+            <a:ext cx="1371600" cy="82296"/>
           </a:xfrm>
           <a:prstGeom prst="rect">
             <a:avLst/>
           </a:prstGeom>
           <a:solidFill>
-            <a:srgbClr val="0E7C7B"/>
+            <a:srgbClr val="A34A38"/>
           </a:solidFill>
           <a:ln>
             <a:noFill/>
           </a:ln>
+          <a:effectLst/>
         </p:spPr>
         <p:style>
           <a:lnRef idx="1">
@@ -4024,8 +5494,8 @@
         </p:nvSpPr>
         <p:spPr>
           <a:xfrm>
-            <a:off x="640080" y="1371600"/>
-            <a:ext cx="5120640" cy="4754880"/>
+            <a:off x="640080" y="1463040"/>
+            <a:ext cx="5029200" cy="3108960"/>
           </a:xfrm>
           <a:prstGeom prst="rect">
             <a:avLst/>
@@ -4039,66 +5509,171 @@
           <a:lstStyle/>
           <a:p>
             <a:pPr marL="171450" indent="-171450">
-              <a:spcBef>
+              <a:lnSpc>
+                <a:spcPct val="108000"/>
+              </a:lnSpc>
+              <a:spcAft>
+                <a:spcPts val="1000"/>
+              </a:spcAft>
+              <a:buChar char="•"/>
+            </a:pPr>
+            <a:r>
+              <a:rPr sz="1600" b="0" i="0">
+                <a:solidFill>
+                  <a:srgbClr val="33231C"/>
+                </a:solidFill>
+                <a:latin typeface="Noto Sans"/>
+              </a:rPr>
+              <a:t>Rata-rata tahun penuh 2015-2025: 783 gempa M≥4,5 per tahun. Tidak ada tren naik/turun yang jelas: aktivitas berfluktuasi mengikuti rangkaian gempa besar dan gempa susulannya.</a:t>
+            </a:r>
+          </a:p>
+          <a:p>
+            <a:pPr marL="171450" indent="-171450">
+              <a:lnSpc>
+                <a:spcPct val="108000"/>
+              </a:lnSpc>
+              <a:spcAft>
+                <a:spcPts val="1000"/>
+              </a:spcAft>
+              <a:buChar char="•"/>
+            </a:pPr>
+            <a:r>
+              <a:rPr sz="1600" b="0" i="0">
+                <a:solidFill>
+                  <a:srgbClr val="33231C"/>
+                </a:solidFill>
+                <a:latin typeface="Noto Sans"/>
+              </a:rPr>
+              <a:t>Tahun tersibuk: 2019 dengan 1.040 kejadian; tersepi: 2016 (595).</a:t>
+            </a:r>
+          </a:p>
+          <a:p>
+            <a:pPr marL="171450" indent="-171450">
+              <a:lnSpc>
+                <a:spcPct val="108000"/>
+              </a:lnSpc>
+              <a:spcAft>
+                <a:spcPts val="1000"/>
+              </a:spcAft>
+              <a:buChar char="•"/>
+            </a:pPr>
+            <a:r>
+              <a:rPr sz="1600" b="0" i="0">
+                <a:solidFill>
+                  <a:srgbClr val="33231C"/>
+                </a:solidFill>
+                <a:latin typeface="Noto Sans"/>
+              </a:rPr>
+              <a:t>2026 baru berjalan sampai 20 Oktober tetapi sudah mencatat 982 kejadian, setara tahun penuh yang sibuk, didorong rangkaian gempa besar tahun ini.</a:t>
+            </a:r>
+          </a:p>
+        </p:txBody>
+      </p:sp>
+      <p:sp>
+        <p:nvSpPr>
+          <p:cNvPr id="5" name="TextBox 4"/>
+          <p:cNvSpPr txBox="1"/>
+          <p:nvPr/>
+        </p:nvSpPr>
+        <p:spPr>
+          <a:xfrm>
+            <a:off x="640080" y="4754880"/>
+            <a:ext cx="5029200" cy="1371600"/>
+          </a:xfrm>
+          <a:prstGeom prst="rect">
+            <a:avLst/>
+          </a:prstGeom>
+          <a:noFill/>
+        </p:spPr>
+        <p:txBody>
+          <a:bodyPr wrap="square">
+            <a:spAutoFit/>
+          </a:bodyPr>
+          <a:lstStyle/>
+          <a:p>
+            <a:pPr>
+              <a:spcAft>
                 <a:spcPts val="200"/>
-              </a:spcBef>
-              <a:spcAft>
-                <a:spcPts val="1000"/>
-              </a:spcAft>
-              <a:buChar char="•"/>
-            </a:pPr>
-            <a:r>
-              <a:rPr sz="1700" b="0" i="0">
-                <a:solidFill>
-                  <a:srgbClr val="1F2937"/>
-                </a:solidFill>
-              </a:rPr>
-              <a:t>Rata-rata tahun penuh 2015–2025: 783 gempa M≥4,5 per tahun. Tidak ada tren naik/turun yang jelas — aktivitas berfluktuasi mengikuti rangkaian gempa besar dan gempa susulannya.</a:t>
-            </a:r>
-          </a:p>
-          <a:p>
-            <a:pPr marL="171450" indent="-171450">
-              <a:spcBef>
-                <a:spcPts val="200"/>
-              </a:spcBef>
-              <a:spcAft>
-                <a:spcPts val="1000"/>
-              </a:spcAft>
-              <a:buChar char="•"/>
-            </a:pPr>
-            <a:r>
-              <a:rPr sz="1700" b="0" i="0">
-                <a:solidFill>
-                  <a:srgbClr val="1F2937"/>
-                </a:solidFill>
-              </a:rPr>
-              <a:t>Tahun tersibuk: 2019 dengan 1.040 kejadian; tersepi: 2016 (595).</a:t>
-            </a:r>
-          </a:p>
-          <a:p>
-            <a:pPr marL="171450" indent="-171450">
-              <a:spcBef>
-                <a:spcPts val="200"/>
-              </a:spcBef>
-              <a:spcAft>
-                <a:spcPts val="1000"/>
-              </a:spcAft>
-              <a:buChar char="•"/>
-            </a:pPr>
-            <a:r>
-              <a:rPr sz="1700" b="0" i="0">
-                <a:solidFill>
-                  <a:srgbClr val="1F2937"/>
-                </a:solidFill>
-              </a:rPr>
-              <a:t>2026 baru berjalan sampai 20 Oktober tetapi sudah mencatat 982 kejadian — setara tahun penuh yang sibuk, didorong rangkaian gempa besar tahun ini.</a:t>
-            </a:r>
+              </a:spcAft>
+            </a:pPr>
+            <a:r>
+              <a:rPr sz="4000" b="1" i="0">
+                <a:solidFill>
+                  <a:srgbClr val="A34A38"/>
+                </a:solidFill>
+                <a:latin typeface="Noto Sans"/>
+              </a:rPr>
+              <a:t>783</a:t>
+            </a:r>
+          </a:p>
+          <a:p>
+            <a:pPr>
+              <a:lnSpc>
+                <a:spcPct val="110000"/>
+              </a:lnSpc>
+              <a:spcAft>
+                <a:spcPts val="0"/>
+              </a:spcAft>
+            </a:pPr>
+            <a:r>
+              <a:rPr sz="1150" b="1" i="0">
+                <a:solidFill>
+                  <a:srgbClr val="33231C"/>
+                </a:solidFill>
+                <a:latin typeface="Noto Sans"/>
+              </a:rPr>
+              <a:t>RATA-RATA GEMPA M≥4,5 PER TAHUN (TAHUN PENUH 2015-2025)</a:t>
+            </a:r>
+          </a:p>
+        </p:txBody>
+      </p:sp>
+      <p:sp>
+        <p:nvSpPr>
+          <p:cNvPr id="6" name="Rectangle 5"/>
+          <p:cNvSpPr/>
+          <p:nvPr/>
+        </p:nvSpPr>
+        <p:spPr>
+          <a:xfrm>
+            <a:off x="5989320" y="1463040"/>
+            <a:ext cx="5559552" cy="4206240"/>
+          </a:xfrm>
+          <a:prstGeom prst="rect">
+            <a:avLst/>
+          </a:prstGeom>
+          <a:solidFill>
+            <a:srgbClr val="F8F2E5"/>
+          </a:solidFill>
+          <a:ln>
+            <a:noFill/>
+          </a:ln>
+          <a:effectLst/>
+        </p:spPr>
+        <p:style>
+          <a:lnRef idx="1">
+            <a:schemeClr val="accent1"/>
+          </a:lnRef>
+          <a:fillRef idx="3">
+            <a:schemeClr val="accent1"/>
+          </a:fillRef>
+          <a:effectRef idx="2">
+            <a:schemeClr val="accent1"/>
+          </a:effectRef>
+          <a:fontRef idx="minor">
+            <a:schemeClr val="lt1"/>
+          </a:fontRef>
+        </p:style>
+        <p:txBody>
+          <a:bodyPr rtlCol="0" anchor="ctr"/>
+          <a:lstStyle/>
+          <a:p>
+            <a:pPr algn="ctr"/>
           </a:p>
         </p:txBody>
       </p:sp>
       <p:pic>
         <p:nvPicPr>
-          <p:cNvPr id="5" name="Picture 4" descr="01_per_tahun.png"/>
+          <p:cNvPr id="7" name="Picture 6" descr="01_per_tahun.png"/>
           <p:cNvPicPr>
             <a:picLocks noChangeAspect="1"/>
           </p:cNvPicPr>
@@ -4112,8 +5687,8 @@
         </p:blipFill>
         <p:spPr>
           <a:xfrm>
-            <a:off x="6217920" y="1371600"/>
-            <a:ext cx="5303520" cy="2171520"/>
+            <a:off x="6126479" y="2484144"/>
+            <a:ext cx="5285232" cy="2164032"/>
           </a:xfrm>
           <a:prstGeom prst="rect">
             <a:avLst/>
@@ -4122,14 +5697,14 @@
       </p:pic>
       <p:sp>
         <p:nvSpPr>
-          <p:cNvPr id="6" name="TextBox 5"/>
+          <p:cNvPr id="8" name="TextBox 7"/>
           <p:cNvSpPr txBox="1"/>
           <p:nvPr/>
         </p:nvSpPr>
         <p:spPr>
           <a:xfrm>
-            <a:off x="640080" y="6126480"/>
-            <a:ext cx="10881360" cy="457200"/>
+            <a:off x="640080" y="6291072"/>
+            <a:ext cx="10908792" cy="365760"/>
           </a:xfrm>
           <a:prstGeom prst="rect">
             <a:avLst/>
@@ -4144,17 +5719,62 @@
           <a:p>
             <a:pPr>
               <a:spcAft>
-                <a:spcPts val="800"/>
+                <a:spcPts val="0"/>
               </a:spcAft>
             </a:pPr>
             <a:r>
               <a:rPr sz="1100" b="0" i="1">
                 <a:solidFill>
-                  <a:srgbClr val="6B7280"/>
-                </a:solidFill>
-              </a:rPr>
-              <a:t>Chart: jumlah gempa per tahun. 2026 (amber) bersifat parsial.</a:t>
-            </a:r>
+                  <a:srgbClr val="8A7A6C"/>
+                </a:solidFill>
+                <a:latin typeface="Noto Sans"/>
+              </a:rPr>
+              <a:t>Chart: jumlah gempa per tahun. 2026 (oranye) bersifat parsial.</a:t>
+            </a:r>
+          </a:p>
+        </p:txBody>
+      </p:sp>
+      <p:sp>
+        <p:nvSpPr>
+          <p:cNvPr id="9" name="Rectangle 8"/>
+          <p:cNvSpPr/>
+          <p:nvPr/>
+        </p:nvSpPr>
+        <p:spPr>
+          <a:xfrm>
+            <a:off x="0" y="6748272"/>
+            <a:ext cx="12191695" cy="109728"/>
+          </a:xfrm>
+          <a:prstGeom prst="rect">
+            <a:avLst/>
+          </a:prstGeom>
+          <a:solidFill>
+            <a:srgbClr val="A34A38"/>
+          </a:solidFill>
+          <a:ln>
+            <a:noFill/>
+          </a:ln>
+          <a:effectLst/>
+        </p:spPr>
+        <p:style>
+          <a:lnRef idx="1">
+            <a:schemeClr val="accent1"/>
+          </a:lnRef>
+          <a:fillRef idx="3">
+            <a:schemeClr val="accent1"/>
+          </a:fillRef>
+          <a:effectRef idx="2">
+            <a:schemeClr val="accent1"/>
+          </a:effectRef>
+          <a:fontRef idx="minor">
+            <a:schemeClr val="lt1"/>
+          </a:fontRef>
+        </p:style>
+        <p:txBody>
+          <a:bodyPr rtlCol="0" anchor="ctr"/>
+          <a:lstStyle/>
+          <a:p>
+            <a:pPr algn="ctr"/>
           </a:p>
         </p:txBody>
       </p:sp>
@@ -4172,7 +5792,7 @@
     <p:bg>
       <p:bgPr>
         <a:solidFill>
-          <a:srgbClr val="FFFFFF"/>
+          <a:srgbClr val="F1E9DA"/>
         </a:solidFill>
         <a:effectLst/>
       </p:bgPr>
@@ -4192,8 +5812,8 @@
         </p:nvSpPr>
         <p:spPr>
           <a:xfrm>
-            <a:off x="640080" y="274320"/>
-            <a:ext cx="10881360" cy="822960"/>
+            <a:off x="640080" y="384048"/>
+            <a:ext cx="10908792" cy="777240"/>
           </a:xfrm>
           <a:prstGeom prst="rect">
             <a:avLst/>
@@ -4208,16 +5828,17 @@
           <a:p>
             <a:pPr>
               <a:spcAft>
-                <a:spcPts val="800"/>
-              </a:spcAft>
-            </a:pPr>
-            <a:r>
-              <a:rPr sz="3000" b="1" i="0">
-                <a:solidFill>
-                  <a:srgbClr val="1E3A8A"/>
-                </a:solidFill>
-              </a:rPr>
-              <a:t>Magnitudo: Yang Besar Itu Langka, Tapi Nyata</a:t>
+                <a:spcPts val="0"/>
+              </a:spcAft>
+            </a:pPr>
+            <a:r>
+              <a:rPr sz="3100" b="1" i="0">
+                <a:solidFill>
+                  <a:srgbClr val="33231C"/>
+                </a:solidFill>
+                <a:latin typeface="Noto Sans"/>
+              </a:rPr>
+              <a:t>MAGNITUDO: YANG BESAR ITU LANGKA, TAPI NYATA</a:t>
             </a:r>
           </a:p>
         </p:txBody>
@@ -4230,18 +5851,19 @@
         </p:nvSpPr>
         <p:spPr>
           <a:xfrm>
-            <a:off x="640080" y="1051560"/>
-            <a:ext cx="1371600" cy="54864"/>
+            <a:off x="658368" y="1188720"/>
+            <a:ext cx="1371600" cy="82296"/>
           </a:xfrm>
           <a:prstGeom prst="rect">
             <a:avLst/>
           </a:prstGeom>
           <a:solidFill>
-            <a:srgbClr val="0E7C7B"/>
+            <a:srgbClr val="DE7A2D"/>
           </a:solidFill>
           <a:ln>
             <a:noFill/>
           </a:ln>
+          <a:effectLst/>
         </p:spPr>
         <p:style>
           <a:lnRef idx="1">
@@ -4267,81 +5889,45 @@
       </p:sp>
       <p:sp>
         <p:nvSpPr>
-          <p:cNvPr id="4" name="TextBox 3"/>
-          <p:cNvSpPr txBox="1"/>
-          <p:nvPr/>
-        </p:nvSpPr>
-        <p:spPr>
-          <a:xfrm>
-            <a:off x="640080" y="1371600"/>
-            <a:ext cx="5120640" cy="4754880"/>
-          </a:xfrm>
-          <a:prstGeom prst="rect">
-            <a:avLst/>
-          </a:prstGeom>
-          <a:noFill/>
-        </p:spPr>
-        <p:txBody>
-          <a:bodyPr wrap="square">
-            <a:spAutoFit/>
-          </a:bodyPr>
-          <a:lstStyle/>
-          <a:p>
-            <a:pPr marL="171450" indent="-171450">
-              <a:spcBef>
-                <a:spcPts val="200"/>
-              </a:spcBef>
-              <a:spcAft>
-                <a:spcPts val="1000"/>
-              </a:spcAft>
-              <a:buChar char="•"/>
-            </a:pPr>
-            <a:r>
-              <a:rPr sz="1700" b="0" i="0">
-                <a:solidFill>
-                  <a:srgbClr val="1F2937"/>
-                </a:solidFill>
-              </a:rPr>
-              <a:t>Dari 9.595 gempa: 2.233 mencapai M≥5,0 — 155 mencapai M≥6,0, dan hanya 16 yang mencapai M≥7,0.</a:t>
-            </a:r>
-          </a:p>
-          <a:p>
-            <a:pPr marL="171450" indent="-171450">
-              <a:spcBef>
-                <a:spcPts val="200"/>
-              </a:spcBef>
-              <a:spcAft>
-                <a:spcPts val="1000"/>
-              </a:spcAft>
-              <a:buChar char="•"/>
-            </a:pPr>
-            <a:r>
-              <a:rPr sz="1700" b="0" i="0">
-                <a:solidFill>
-                  <a:srgbClr val="1F2937"/>
-                </a:solidFill>
-              </a:rPr>
-              <a:t>Median magnitudo hanya 4,7: sebagian besar gempa Indonesia kecil. Risiko terkonsentrasi di ekor distribusi — belasan gempa M7+ per dekade.</a:t>
-            </a:r>
-          </a:p>
-          <a:p>
-            <a:pPr marL="171450" indent="-171450">
-              <a:spcBef>
-                <a:spcPts val="200"/>
-              </a:spcBef>
-              <a:spcAft>
-                <a:spcPts val="1000"/>
-              </a:spcAft>
-              <a:buChar char="•"/>
-            </a:pPr>
-            <a:r>
-              <a:rPr sz="1700" b="0" i="0">
-                <a:solidFill>
-                  <a:srgbClr val="1F2937"/>
-                </a:solidFill>
-              </a:rPr>
-              <a:t>Pola ini konsisten dengan hukum Gutenberg–Richter: setiap kenaikan 1 skala magnitudo, frekuensi turun kira-kira 10 kali lipat.</a:t>
-            </a:r>
+          <p:cNvPr id="4" name="Rectangle 3"/>
+          <p:cNvSpPr/>
+          <p:nvPr/>
+        </p:nvSpPr>
+        <p:spPr>
+          <a:xfrm>
+            <a:off x="640080" y="1463040"/>
+            <a:ext cx="5559552" cy="4206240"/>
+          </a:xfrm>
+          <a:prstGeom prst="rect">
+            <a:avLst/>
+          </a:prstGeom>
+          <a:solidFill>
+            <a:srgbClr val="F8F2E5"/>
+          </a:solidFill>
+          <a:ln>
+            <a:noFill/>
+          </a:ln>
+          <a:effectLst/>
+        </p:spPr>
+        <p:style>
+          <a:lnRef idx="1">
+            <a:schemeClr val="accent1"/>
+          </a:lnRef>
+          <a:fillRef idx="3">
+            <a:schemeClr val="accent1"/>
+          </a:fillRef>
+          <a:effectRef idx="2">
+            <a:schemeClr val="accent1"/>
+          </a:effectRef>
+          <a:fontRef idx="minor">
+            <a:schemeClr val="lt1"/>
+          </a:fontRef>
+        </p:style>
+        <p:txBody>
+          <a:bodyPr rtlCol="0" anchor="ctr"/>
+          <a:lstStyle/>
+          <a:p>
+            <a:pPr algn="ctr"/>
           </a:p>
         </p:txBody>
       </p:sp>
@@ -4361,8 +5947,8 @@
         </p:blipFill>
         <p:spPr>
           <a:xfrm>
-            <a:off x="6217920" y="1371600"/>
-            <a:ext cx="5303520" cy="2171520"/>
+            <a:off x="777239" y="2484144"/>
+            <a:ext cx="5285232" cy="2164032"/>
           </a:xfrm>
           <a:prstGeom prst="rect">
             <a:avLst/>
@@ -4377,8 +5963,8 @@
         </p:nvSpPr>
         <p:spPr>
           <a:xfrm>
-            <a:off x="640080" y="6126480"/>
-            <a:ext cx="10881360" cy="457200"/>
+            <a:off x="6492240" y="1463040"/>
+            <a:ext cx="5056632" cy="2926080"/>
           </a:xfrm>
           <a:prstGeom prst="rect">
             <a:avLst/>
@@ -4391,19 +5977,453 @@
           </a:bodyPr>
           <a:lstStyle/>
           <a:p>
+            <a:pPr marL="171450" indent="-171450">
+              <a:lnSpc>
+                <a:spcPct val="108000"/>
+              </a:lnSpc>
+              <a:spcAft>
+                <a:spcPts val="1000"/>
+              </a:spcAft>
+              <a:buChar char="•"/>
+            </a:pPr>
+            <a:r>
+              <a:rPr sz="1600" b="0" i="0">
+                <a:solidFill>
+                  <a:srgbClr val="33231C"/>
+                </a:solidFill>
+                <a:latin typeface="Noto Sans"/>
+              </a:rPr>
+              <a:t>Dari 9.595 gempa: 2.233 mencapai M≥5,0, 155 mencapai M≥6,0, dan hanya 16 yang mencapai M≥7,0.</a:t>
+            </a:r>
+          </a:p>
+          <a:p>
+            <a:pPr marL="171450" indent="-171450">
+              <a:lnSpc>
+                <a:spcPct val="108000"/>
+              </a:lnSpc>
+              <a:spcAft>
+                <a:spcPts val="1000"/>
+              </a:spcAft>
+              <a:buChar char="•"/>
+            </a:pPr>
+            <a:r>
+              <a:rPr sz="1600" b="0" i="0">
+                <a:solidFill>
+                  <a:srgbClr val="33231C"/>
+                </a:solidFill>
+                <a:latin typeface="Noto Sans"/>
+              </a:rPr>
+              <a:t>Median magnitudo hanya 4,7: sebagian besar gempa Indonesia kecil. Risiko terkonsentrasi di ekor distribusi: belasan gempa M7+ per dekade.</a:t>
+            </a:r>
+          </a:p>
+          <a:p>
+            <a:pPr marL="171450" indent="-171450">
+              <a:lnSpc>
+                <a:spcPct val="108000"/>
+              </a:lnSpc>
+              <a:spcAft>
+                <a:spcPts val="1000"/>
+              </a:spcAft>
+              <a:buChar char="•"/>
+            </a:pPr>
+            <a:r>
+              <a:rPr sz="1600" b="0" i="0">
+                <a:solidFill>
+                  <a:srgbClr val="33231C"/>
+                </a:solidFill>
+                <a:latin typeface="Noto Sans"/>
+              </a:rPr>
+              <a:t>Pola ini konsisten dengan hukum Gutenberg-Richter: setiap kenaikan 1 skala magnitudo, frekuensi turun kira-kira 10 kali lipat.</a:t>
+            </a:r>
+          </a:p>
+        </p:txBody>
+      </p:sp>
+      <p:sp>
+        <p:nvSpPr>
+          <p:cNvPr id="7" name="Rectangle 6"/>
+          <p:cNvSpPr/>
+          <p:nvPr/>
+        </p:nvSpPr>
+        <p:spPr>
+          <a:xfrm>
+            <a:off x="6492240" y="4572000"/>
+            <a:ext cx="1627632" cy="1188720"/>
+          </a:xfrm>
+          <a:prstGeom prst="rect">
+            <a:avLst/>
+          </a:prstGeom>
+          <a:solidFill>
+            <a:srgbClr val="A34A38"/>
+          </a:solidFill>
+          <a:ln>
+            <a:noFill/>
+          </a:ln>
+          <a:effectLst/>
+        </p:spPr>
+        <p:style>
+          <a:lnRef idx="1">
+            <a:schemeClr val="accent1"/>
+          </a:lnRef>
+          <a:fillRef idx="3">
+            <a:schemeClr val="accent1"/>
+          </a:fillRef>
+          <a:effectRef idx="2">
+            <a:schemeClr val="accent1"/>
+          </a:effectRef>
+          <a:fontRef idx="minor">
+            <a:schemeClr val="lt1"/>
+          </a:fontRef>
+        </p:style>
+        <p:txBody>
+          <a:bodyPr rtlCol="0" anchor="ctr"/>
+          <a:lstStyle/>
+          <a:p>
+            <a:pPr algn="ctr"/>
+          </a:p>
+        </p:txBody>
+      </p:sp>
+      <p:sp>
+        <p:nvSpPr>
+          <p:cNvPr id="8" name="TextBox 7"/>
+          <p:cNvSpPr txBox="1"/>
+          <p:nvPr/>
+        </p:nvSpPr>
+        <p:spPr>
+          <a:xfrm>
+            <a:off x="6720840" y="4700016"/>
+            <a:ext cx="1170432" cy="932688"/>
+          </a:xfrm>
+          <a:prstGeom prst="rect">
+            <a:avLst/>
+          </a:prstGeom>
+          <a:noFill/>
+        </p:spPr>
+        <p:txBody>
+          <a:bodyPr wrap="square">
+            <a:spAutoFit/>
+          </a:bodyPr>
+          <a:lstStyle/>
+          <a:p>
             <a:pPr>
               <a:spcAft>
-                <a:spcPts val="800"/>
+                <a:spcPts val="200"/>
+              </a:spcAft>
+            </a:pPr>
+            <a:r>
+              <a:rPr sz="2200" b="1" i="0">
+                <a:solidFill>
+                  <a:srgbClr val="FFFFFF"/>
+                </a:solidFill>
+                <a:latin typeface="Noto Sans"/>
+              </a:rPr>
+              <a:t>2.233</a:t>
+            </a:r>
+          </a:p>
+          <a:p>
+            <a:pPr>
+              <a:lnSpc>
+                <a:spcPct val="105000"/>
+              </a:lnSpc>
+              <a:spcAft>
+                <a:spcPts val="0"/>
+              </a:spcAft>
+            </a:pPr>
+            <a:r>
+              <a:rPr sz="1100" b="1" i="0">
+                <a:solidFill>
+                  <a:srgbClr val="FFFFFF"/>
+                </a:solidFill>
+                <a:latin typeface="Noto Sans"/>
+              </a:rPr>
+              <a:t>M≥5,0</a:t>
+            </a:r>
+          </a:p>
+        </p:txBody>
+      </p:sp>
+      <p:sp>
+        <p:nvSpPr>
+          <p:cNvPr id="9" name="Rectangle 8"/>
+          <p:cNvSpPr/>
+          <p:nvPr/>
+        </p:nvSpPr>
+        <p:spPr>
+          <a:xfrm>
+            <a:off x="8229600" y="4572000"/>
+            <a:ext cx="1627632" cy="1188720"/>
+          </a:xfrm>
+          <a:prstGeom prst="rect">
+            <a:avLst/>
+          </a:prstGeom>
+          <a:solidFill>
+            <a:srgbClr val="DE7A2D"/>
+          </a:solidFill>
+          <a:ln>
+            <a:noFill/>
+          </a:ln>
+          <a:effectLst/>
+        </p:spPr>
+        <p:style>
+          <a:lnRef idx="1">
+            <a:schemeClr val="accent1"/>
+          </a:lnRef>
+          <a:fillRef idx="3">
+            <a:schemeClr val="accent1"/>
+          </a:fillRef>
+          <a:effectRef idx="2">
+            <a:schemeClr val="accent1"/>
+          </a:effectRef>
+          <a:fontRef idx="minor">
+            <a:schemeClr val="lt1"/>
+          </a:fontRef>
+        </p:style>
+        <p:txBody>
+          <a:bodyPr rtlCol="0" anchor="ctr"/>
+          <a:lstStyle/>
+          <a:p>
+            <a:pPr algn="ctr"/>
+          </a:p>
+        </p:txBody>
+      </p:sp>
+      <p:sp>
+        <p:nvSpPr>
+          <p:cNvPr id="10" name="TextBox 9"/>
+          <p:cNvSpPr txBox="1"/>
+          <p:nvPr/>
+        </p:nvSpPr>
+        <p:spPr>
+          <a:xfrm>
+            <a:off x="8458200" y="4700016"/>
+            <a:ext cx="1170432" cy="932688"/>
+          </a:xfrm>
+          <a:prstGeom prst="rect">
+            <a:avLst/>
+          </a:prstGeom>
+          <a:noFill/>
+        </p:spPr>
+        <p:txBody>
+          <a:bodyPr wrap="square">
+            <a:spAutoFit/>
+          </a:bodyPr>
+          <a:lstStyle/>
+          <a:p>
+            <a:pPr>
+              <a:spcAft>
+                <a:spcPts val="200"/>
+              </a:spcAft>
+            </a:pPr>
+            <a:r>
+              <a:rPr sz="2200" b="1" i="0">
+                <a:solidFill>
+                  <a:srgbClr val="33231C"/>
+                </a:solidFill>
+                <a:latin typeface="Noto Sans"/>
+              </a:rPr>
+              <a:t>155</a:t>
+            </a:r>
+          </a:p>
+          <a:p>
+            <a:pPr>
+              <a:lnSpc>
+                <a:spcPct val="105000"/>
+              </a:lnSpc>
+              <a:spcAft>
+                <a:spcPts val="0"/>
+              </a:spcAft>
+            </a:pPr>
+            <a:r>
+              <a:rPr sz="1100" b="1" i="0">
+                <a:solidFill>
+                  <a:srgbClr val="33231C"/>
+                </a:solidFill>
+                <a:latin typeface="Noto Sans"/>
+              </a:rPr>
+              <a:t>M≥6,0</a:t>
+            </a:r>
+          </a:p>
+        </p:txBody>
+      </p:sp>
+      <p:sp>
+        <p:nvSpPr>
+          <p:cNvPr id="11" name="Rectangle 10"/>
+          <p:cNvSpPr/>
+          <p:nvPr/>
+        </p:nvSpPr>
+        <p:spPr>
+          <a:xfrm>
+            <a:off x="9966960" y="4572000"/>
+            <a:ext cx="1581912" cy="1188720"/>
+          </a:xfrm>
+          <a:prstGeom prst="rect">
+            <a:avLst/>
+          </a:prstGeom>
+          <a:solidFill>
+            <a:srgbClr val="C97B63"/>
+          </a:solidFill>
+          <a:ln>
+            <a:noFill/>
+          </a:ln>
+          <a:effectLst/>
+        </p:spPr>
+        <p:style>
+          <a:lnRef idx="1">
+            <a:schemeClr val="accent1"/>
+          </a:lnRef>
+          <a:fillRef idx="3">
+            <a:schemeClr val="accent1"/>
+          </a:fillRef>
+          <a:effectRef idx="2">
+            <a:schemeClr val="accent1"/>
+          </a:effectRef>
+          <a:fontRef idx="minor">
+            <a:schemeClr val="lt1"/>
+          </a:fontRef>
+        </p:style>
+        <p:txBody>
+          <a:bodyPr rtlCol="0" anchor="ctr"/>
+          <a:lstStyle/>
+          <a:p>
+            <a:pPr algn="ctr"/>
+          </a:p>
+        </p:txBody>
+      </p:sp>
+      <p:sp>
+        <p:nvSpPr>
+          <p:cNvPr id="12" name="TextBox 11"/>
+          <p:cNvSpPr txBox="1"/>
+          <p:nvPr/>
+        </p:nvSpPr>
+        <p:spPr>
+          <a:xfrm>
+            <a:off x="10195560" y="4700016"/>
+            <a:ext cx="1124712" cy="932688"/>
+          </a:xfrm>
+          <a:prstGeom prst="rect">
+            <a:avLst/>
+          </a:prstGeom>
+          <a:noFill/>
+        </p:spPr>
+        <p:txBody>
+          <a:bodyPr wrap="square">
+            <a:spAutoFit/>
+          </a:bodyPr>
+          <a:lstStyle/>
+          <a:p>
+            <a:pPr>
+              <a:spcAft>
+                <a:spcPts val="200"/>
+              </a:spcAft>
+            </a:pPr>
+            <a:r>
+              <a:rPr sz="2200" b="1" i="0">
+                <a:solidFill>
+                  <a:srgbClr val="33231C"/>
+                </a:solidFill>
+                <a:latin typeface="Noto Sans"/>
+              </a:rPr>
+              <a:t>16</a:t>
+            </a:r>
+          </a:p>
+          <a:p>
+            <a:pPr>
+              <a:lnSpc>
+                <a:spcPct val="105000"/>
+              </a:lnSpc>
+              <a:spcAft>
+                <a:spcPts val="0"/>
+              </a:spcAft>
+            </a:pPr>
+            <a:r>
+              <a:rPr sz="1100" b="1" i="0">
+                <a:solidFill>
+                  <a:srgbClr val="33231C"/>
+                </a:solidFill>
+                <a:latin typeface="Noto Sans"/>
+              </a:rPr>
+              <a:t>M≥7,0</a:t>
+            </a:r>
+          </a:p>
+        </p:txBody>
+      </p:sp>
+      <p:sp>
+        <p:nvSpPr>
+          <p:cNvPr id="13" name="TextBox 12"/>
+          <p:cNvSpPr txBox="1"/>
+          <p:nvPr/>
+        </p:nvSpPr>
+        <p:spPr>
+          <a:xfrm>
+            <a:off x="640080" y="6291072"/>
+            <a:ext cx="10908792" cy="365760"/>
+          </a:xfrm>
+          <a:prstGeom prst="rect">
+            <a:avLst/>
+          </a:prstGeom>
+          <a:noFill/>
+        </p:spPr>
+        <p:txBody>
+          <a:bodyPr wrap="square">
+            <a:spAutoFit/>
+          </a:bodyPr>
+          <a:lstStyle/>
+          <a:p>
+            <a:pPr>
+              <a:spcAft>
+                <a:spcPts val="0"/>
               </a:spcAft>
             </a:pPr>
             <a:r>
               <a:rPr sz="1100" b="0" i="1">
                 <a:solidFill>
-                  <a:srgbClr val="6B7280"/>
-                </a:solidFill>
-              </a:rPr>
-              <a:t>Chart: kejadian per kelas magnitudo, 2015–2026.</a:t>
-            </a:r>
+                  <a:srgbClr val="8A7A6C"/>
+                </a:solidFill>
+                <a:latin typeface="Noto Sans"/>
+              </a:rPr>
+              <a:t>Chart: kejadian per kelas magnitudo, 2015-2026.</a:t>
+            </a:r>
+          </a:p>
+        </p:txBody>
+      </p:sp>
+      <p:sp>
+        <p:nvSpPr>
+          <p:cNvPr id="14" name="Rectangle 13"/>
+          <p:cNvSpPr/>
+          <p:nvPr/>
+        </p:nvSpPr>
+        <p:spPr>
+          <a:xfrm>
+            <a:off x="0" y="6748272"/>
+            <a:ext cx="12191695" cy="109728"/>
+          </a:xfrm>
+          <a:prstGeom prst="rect">
+            <a:avLst/>
+          </a:prstGeom>
+          <a:solidFill>
+            <a:srgbClr val="A34A38"/>
+          </a:solidFill>
+          <a:ln>
+            <a:noFill/>
+          </a:ln>
+          <a:effectLst/>
+        </p:spPr>
+        <p:style>
+          <a:lnRef idx="1">
+            <a:schemeClr val="accent1"/>
+          </a:lnRef>
+          <a:fillRef idx="3">
+            <a:schemeClr val="accent1"/>
+          </a:fillRef>
+          <a:effectRef idx="2">
+            <a:schemeClr val="accent1"/>
+          </a:effectRef>
+          <a:fontRef idx="minor">
+            <a:schemeClr val="lt1"/>
+          </a:fontRef>
+        </p:style>
+        <p:txBody>
+          <a:bodyPr rtlCol="0" anchor="ctr"/>
+          <a:lstStyle/>
+          <a:p>
+            <a:pPr algn="ctr"/>
           </a:p>
         </p:txBody>
       </p:sp>
@@ -4421,7 +6441,7 @@
     <p:bg>
       <p:bgPr>
         <a:solidFill>
-          <a:srgbClr val="FFFFFF"/>
+          <a:srgbClr val="F1E9DA"/>
         </a:solidFill>
         <a:effectLst/>
       </p:bgPr>
@@ -4441,8 +6461,8 @@
         </p:nvSpPr>
         <p:spPr>
           <a:xfrm>
-            <a:off x="640080" y="274320"/>
-            <a:ext cx="10881360" cy="822960"/>
+            <a:off x="640080" y="384048"/>
+            <a:ext cx="10908792" cy="777240"/>
           </a:xfrm>
           <a:prstGeom prst="rect">
             <a:avLst/>
@@ -4457,16 +6477,17 @@
           <a:p>
             <a:pPr>
               <a:spcAft>
-                <a:spcPts val="800"/>
-              </a:spcAft>
-            </a:pPr>
-            <a:r>
-              <a:rPr sz="3000" b="1" i="0">
-                <a:solidFill>
-                  <a:srgbClr val="1E3A8A"/>
-                </a:solidFill>
-              </a:rPr>
-              <a:t>Gempa Terbesar dalam 12 Tahun</a:t>
+                <a:spcPts val="0"/>
+              </a:spcAft>
+            </a:pPr>
+            <a:r>
+              <a:rPr sz="3100" b="1" i="0">
+                <a:solidFill>
+                  <a:srgbClr val="33231C"/>
+                </a:solidFill>
+                <a:latin typeface="Noto Sans"/>
+              </a:rPr>
+              <a:t>GEMPA TERBESAR DALAM 12 TAHUN</a:t>
             </a:r>
           </a:p>
         </p:txBody>
@@ -4479,18 +6500,19 @@
         </p:nvSpPr>
         <p:spPr>
           <a:xfrm>
-            <a:off x="640080" y="1051560"/>
-            <a:ext cx="1371600" cy="54864"/>
+            <a:off x="658368" y="1188720"/>
+            <a:ext cx="1371600" cy="82296"/>
           </a:xfrm>
           <a:prstGeom prst="rect">
             <a:avLst/>
           </a:prstGeom>
           <a:solidFill>
-            <a:srgbClr val="0E7C7B"/>
+            <a:srgbClr val="A34A38"/>
           </a:solidFill>
           <a:ln>
             <a:noFill/>
           </a:ln>
+          <a:effectLst/>
         </p:spPr>
         <p:style>
           <a:lnRef idx="1">
@@ -4516,14 +6538,58 @@
       </p:sp>
       <p:sp>
         <p:nvSpPr>
-          <p:cNvPr id="4" name="TextBox 3"/>
+          <p:cNvPr id="4" name="Rectangle 3"/>
+          <p:cNvSpPr/>
+          <p:nvPr/>
+        </p:nvSpPr>
+        <p:spPr>
+          <a:xfrm>
+            <a:off x="640080" y="1463040"/>
+            <a:ext cx="5029200" cy="1417320"/>
+          </a:xfrm>
+          <a:prstGeom prst="rect">
+            <a:avLst/>
+          </a:prstGeom>
+          <a:solidFill>
+            <a:srgbClr val="A34A38"/>
+          </a:solidFill>
+          <a:ln>
+            <a:noFill/>
+          </a:ln>
+          <a:effectLst/>
+        </p:spPr>
+        <p:style>
+          <a:lnRef idx="1">
+            <a:schemeClr val="accent1"/>
+          </a:lnRef>
+          <a:fillRef idx="3">
+            <a:schemeClr val="accent1"/>
+          </a:fillRef>
+          <a:effectRef idx="2">
+            <a:schemeClr val="accent1"/>
+          </a:effectRef>
+          <a:fontRef idx="minor">
+            <a:schemeClr val="lt1"/>
+          </a:fontRef>
+        </p:style>
+        <p:txBody>
+          <a:bodyPr rtlCol="0" anchor="ctr"/>
+          <a:lstStyle/>
+          <a:p>
+            <a:pPr algn="ctr"/>
+          </a:p>
+        </p:txBody>
+      </p:sp>
+      <p:sp>
+        <p:nvSpPr>
+          <p:cNvPr id="5" name="TextBox 4"/>
           <p:cNvSpPr txBox="1"/>
           <p:nvPr/>
         </p:nvSpPr>
         <p:spPr>
           <a:xfrm>
-            <a:off x="640080" y="1371600"/>
-            <a:ext cx="5120640" cy="4754880"/>
+            <a:off x="868680" y="1591056"/>
+            <a:ext cx="4572000" cy="1161288"/>
           </a:xfrm>
           <a:prstGeom prst="rect">
             <a:avLst/>
@@ -4536,67 +6602,172 @@
           </a:bodyPr>
           <a:lstStyle/>
           <a:p>
+            <a:pPr>
+              <a:spcAft>
+                <a:spcPts val="200"/>
+              </a:spcAft>
+            </a:pPr>
+            <a:r>
+              <a:rPr sz="4800" b="1" i="0">
+                <a:solidFill>
+                  <a:srgbClr val="FFFFFF"/>
+                </a:solidFill>
+                <a:latin typeface="Noto Sans"/>
+              </a:rPr>
+              <a:t>M7,8</a:t>
+            </a:r>
+          </a:p>
+          <a:p>
+            <a:pPr>
+              <a:lnSpc>
+                <a:spcPct val="105000"/>
+              </a:lnSpc>
+              <a:spcAft>
+                <a:spcPts val="0"/>
+              </a:spcAft>
+            </a:pPr>
+            <a:r>
+              <a:rPr sz="1100" b="1" i="0">
+                <a:solidFill>
+                  <a:srgbClr val="FFFFFF"/>
+                </a:solidFill>
+                <a:latin typeface="Noto Sans"/>
+              </a:rPr>
+              <a:t>66 KM NNW OF ENDE, INDONESIA (2026-08-15), KEDALAMAN 10 KM</a:t>
+            </a:r>
+          </a:p>
+        </p:txBody>
+      </p:sp>
+      <p:sp>
+        <p:nvSpPr>
+          <p:cNvPr id="6" name="TextBox 5"/>
+          <p:cNvSpPr txBox="1"/>
+          <p:nvPr/>
+        </p:nvSpPr>
+        <p:spPr>
+          <a:xfrm>
+            <a:off x="640080" y="3154680"/>
+            <a:ext cx="5029200" cy="2926080"/>
+          </a:xfrm>
+          <a:prstGeom prst="rect">
+            <a:avLst/>
+          </a:prstGeom>
+          <a:noFill/>
+        </p:spPr>
+        <p:txBody>
+          <a:bodyPr wrap="square">
+            <a:spAutoFit/>
+          </a:bodyPr>
+          <a:lstStyle/>
+          <a:p>
             <a:pPr marL="171450" indent="-171450">
-              <a:spcBef>
-                <a:spcPts val="200"/>
-              </a:spcBef>
+              <a:lnSpc>
+                <a:spcPct val="108000"/>
+              </a:lnSpc>
               <a:spcAft>
                 <a:spcPts val="1000"/>
               </a:spcAft>
               <a:buChar char="•"/>
             </a:pPr>
             <a:r>
-              <a:rPr sz="1700" b="0" i="0">
-                <a:solidFill>
-                  <a:srgbClr val="1F2937"/>
-                </a:solidFill>
-              </a:rPr>
-              <a:t>Terbesar: M7.8 — 66 km NNW of Ende, Indonesia (2026-08-15), kedalaman hanya 10 km. Besar dan dangkal: kombinasi paling berbahaya.</a:t>
+              <a:rPr sz="1550" b="0" i="0">
+                <a:solidFill>
+                  <a:srgbClr val="33231C"/>
+                </a:solidFill>
+                <a:latin typeface="Noto Sans"/>
+              </a:rPr>
+              <a:t>Terbesar: M7,8, 66 km NNW of Ende, Indonesia (2026-08-15), kedalaman hanya 10 km. Besar dan dangkal: kombinasi paling berbahaya.</a:t>
             </a:r>
           </a:p>
           <a:p>
             <a:pPr marL="171450" indent="-171450">
-              <a:spcBef>
-                <a:spcPts val="200"/>
-              </a:spcBef>
+              <a:lnSpc>
+                <a:spcPct val="108000"/>
+              </a:lnSpc>
               <a:spcAft>
                 <a:spcPts val="1000"/>
               </a:spcAft>
               <a:buChar char="•"/>
             </a:pPr>
             <a:r>
-              <a:rPr sz="1700" b="0" i="0">
-                <a:solidFill>
-                  <a:srgbClr val="1F2937"/>
-                </a:solidFill>
-              </a:rPr>
-              <a:t>Nama yang paling diingat publik: M7.5 Palu, Sulawesi (2018-09-28) — gempa dangkal 20 km yang memicu tsunami dan likuefaksi.</a:t>
+              <a:rPr sz="1550" b="0" i="0">
+                <a:solidFill>
+                  <a:srgbClr val="33231C"/>
+                </a:solidFill>
+                <a:latin typeface="Noto Sans"/>
+              </a:rPr>
+              <a:t>Nama yang paling diingat publik: M7,5 Palu, Sulawesi (2018-09-28): gempa dangkal 20 km yang memicu tsunami dan likuefaksi.</a:t>
             </a:r>
           </a:p>
           <a:p>
             <a:pPr marL="171450" indent="-171450">
-              <a:spcBef>
-                <a:spcPts val="200"/>
-              </a:spcBef>
+              <a:lnSpc>
+                <a:spcPct val="108000"/>
+              </a:lnSpc>
               <a:spcAft>
                 <a:spcPts val="1000"/>
               </a:spcAft>
               <a:buChar char="•"/>
             </a:pPr>
             <a:r>
-              <a:rPr sz="1700" b="0" i="0">
-                <a:solidFill>
-                  <a:srgbClr val="1F2937"/>
-                </a:solidFill>
-              </a:rPr>
-              <a:t>10 daftar teratas didominasi kawasan timur (NTT, Tanimbar, Halmahera, Laut Banda) dan Sulawesi — bukan Jawa yang penduduknya terpadat.</a:t>
-            </a:r>
+              <a:rPr sz="1550" b="0" i="0">
+                <a:solidFill>
+                  <a:srgbClr val="33231C"/>
+                </a:solidFill>
+                <a:latin typeface="Noto Sans"/>
+              </a:rPr>
+              <a:t>10 daftar teratas didominasi kawasan timur (NTT, Tanimbar, Halmahera, Laut Banda) dan Sulawesi, bukan Jawa yang penduduknya terpadat.</a:t>
+            </a:r>
+          </a:p>
+        </p:txBody>
+      </p:sp>
+      <p:sp>
+        <p:nvSpPr>
+          <p:cNvPr id="7" name="Rectangle 6"/>
+          <p:cNvSpPr/>
+          <p:nvPr/>
+        </p:nvSpPr>
+        <p:spPr>
+          <a:xfrm>
+            <a:off x="5989320" y="1463040"/>
+            <a:ext cx="5559552" cy="4206240"/>
+          </a:xfrm>
+          <a:prstGeom prst="rect">
+            <a:avLst/>
+          </a:prstGeom>
+          <a:solidFill>
+            <a:srgbClr val="F8F2E5"/>
+          </a:solidFill>
+          <a:ln>
+            <a:noFill/>
+          </a:ln>
+          <a:effectLst/>
+        </p:spPr>
+        <p:style>
+          <a:lnRef idx="1">
+            <a:schemeClr val="accent1"/>
+          </a:lnRef>
+          <a:fillRef idx="3">
+            <a:schemeClr val="accent1"/>
+          </a:fillRef>
+          <a:effectRef idx="2">
+            <a:schemeClr val="accent1"/>
+          </a:effectRef>
+          <a:fontRef idx="minor">
+            <a:schemeClr val="lt1"/>
+          </a:fontRef>
+        </p:style>
+        <p:txBody>
+          <a:bodyPr rtlCol="0" anchor="ctr"/>
+          <a:lstStyle/>
+          <a:p>
+            <a:pPr algn="ctr"/>
           </a:p>
         </p:txBody>
       </p:sp>
       <p:pic>
         <p:nvPicPr>
-          <p:cNvPr id="5" name="Picture 4" descr="09_top10_terbesar.png"/>
+          <p:cNvPr id="8" name="Picture 7" descr="09_top10_terbesar.png"/>
           <p:cNvPicPr>
             <a:picLocks noChangeAspect="1"/>
           </p:cNvPicPr>
@@ -4610,8 +6781,8 @@
         </p:blipFill>
         <p:spPr>
           <a:xfrm>
-            <a:off x="6217920" y="1371600"/>
-            <a:ext cx="5303520" cy="2662159"/>
+            <a:off x="6126479" y="2234448"/>
+            <a:ext cx="5285232" cy="2663424"/>
           </a:xfrm>
           <a:prstGeom prst="rect">
             <a:avLst/>
@@ -4620,14 +6791,14 @@
       </p:pic>
       <p:sp>
         <p:nvSpPr>
-          <p:cNvPr id="6" name="TextBox 5"/>
+          <p:cNvPr id="9" name="TextBox 8"/>
           <p:cNvSpPr txBox="1"/>
           <p:nvPr/>
         </p:nvSpPr>
         <p:spPr>
           <a:xfrm>
-            <a:off x="640080" y="6126480"/>
-            <a:ext cx="10881360" cy="457200"/>
+            <a:off x="640080" y="6291072"/>
+            <a:ext cx="10908792" cy="365760"/>
           </a:xfrm>
           <a:prstGeom prst="rect">
             <a:avLst/>
@@ -4642,17 +6813,62 @@
           <a:p>
             <a:pPr>
               <a:spcAft>
-                <a:spcPts val="800"/>
+                <a:spcPts val="0"/>
               </a:spcAft>
             </a:pPr>
             <a:r>
               <a:rPr sz="1100" b="0" i="1">
                 <a:solidFill>
-                  <a:srgbClr val="6B7280"/>
-                </a:solidFill>
-              </a:rPr>
-              <a:t>Chart: 10 gempa terbesar 2015–2026 berdasarkan katalog USGS.</a:t>
-            </a:r>
+                  <a:srgbClr val="8A7A6C"/>
+                </a:solidFill>
+                <a:latin typeface="Noto Sans"/>
+              </a:rPr>
+              <a:t>Chart: 10 gempa terbesar 2015-2026 berdasarkan katalog USGS.</a:t>
+            </a:r>
+          </a:p>
+        </p:txBody>
+      </p:sp>
+      <p:sp>
+        <p:nvSpPr>
+          <p:cNvPr id="10" name="Rectangle 9"/>
+          <p:cNvSpPr/>
+          <p:nvPr/>
+        </p:nvSpPr>
+        <p:spPr>
+          <a:xfrm>
+            <a:off x="0" y="6748272"/>
+            <a:ext cx="12191695" cy="109728"/>
+          </a:xfrm>
+          <a:prstGeom prst="rect">
+            <a:avLst/>
+          </a:prstGeom>
+          <a:solidFill>
+            <a:srgbClr val="A34A38"/>
+          </a:solidFill>
+          <a:ln>
+            <a:noFill/>
+          </a:ln>
+          <a:effectLst/>
+        </p:spPr>
+        <p:style>
+          <a:lnRef idx="1">
+            <a:schemeClr val="accent1"/>
+          </a:lnRef>
+          <a:fillRef idx="3">
+            <a:schemeClr val="accent1"/>
+          </a:fillRef>
+          <a:effectRef idx="2">
+            <a:schemeClr val="accent1"/>
+          </a:effectRef>
+          <a:fontRef idx="minor">
+            <a:schemeClr val="lt1"/>
+          </a:fontRef>
+        </p:style>
+        <p:txBody>
+          <a:bodyPr rtlCol="0" anchor="ctr"/>
+          <a:lstStyle/>
+          <a:p>
+            <a:pPr algn="ctr"/>
           </a:p>
         </p:txBody>
       </p:sp>
@@ -4670,7 +6886,7 @@
     <p:bg>
       <p:bgPr>
         <a:solidFill>
-          <a:srgbClr val="FFFFFF"/>
+          <a:srgbClr val="F1E9DA"/>
         </a:solidFill>
         <a:effectLst/>
       </p:bgPr>
@@ -4690,8 +6906,8 @@
         </p:nvSpPr>
         <p:spPr>
           <a:xfrm>
-            <a:off x="640080" y="274320"/>
-            <a:ext cx="10881360" cy="822960"/>
+            <a:off x="640080" y="384048"/>
+            <a:ext cx="10908792" cy="777240"/>
           </a:xfrm>
           <a:prstGeom prst="rect">
             <a:avLst/>
@@ -4706,16 +6922,17 @@
           <a:p>
             <a:pPr>
               <a:spcAft>
-                <a:spcPts val="800"/>
-              </a:spcAft>
-            </a:pPr>
-            <a:r>
-              <a:rPr sz="3000" b="1" i="0">
-                <a:solidFill>
-                  <a:srgbClr val="1E3A8A"/>
-                </a:solidFill>
-              </a:rPr>
-              <a:t>Kedalaman: 7 dari 10 Gempa Itu Dangkal</a:t>
+                <a:spcPts val="0"/>
+              </a:spcAft>
+            </a:pPr>
+            <a:r>
+              <a:rPr sz="3100" b="1" i="0">
+                <a:solidFill>
+                  <a:srgbClr val="33231C"/>
+                </a:solidFill>
+                <a:latin typeface="Noto Sans"/>
+              </a:rPr>
+              <a:t>KEDALAMAN: 7 DARI 10 GEMPA ITU DANGKAL</a:t>
             </a:r>
           </a:p>
         </p:txBody>
@@ -4728,18 +6945,19 @@
         </p:nvSpPr>
         <p:spPr>
           <a:xfrm>
-            <a:off x="640080" y="1051560"/>
-            <a:ext cx="1371600" cy="54864"/>
+            <a:off x="658368" y="1188720"/>
+            <a:ext cx="1371600" cy="82296"/>
           </a:xfrm>
           <a:prstGeom prst="rect">
             <a:avLst/>
           </a:prstGeom>
           <a:solidFill>
-            <a:srgbClr val="0E7C7B"/>
+            <a:srgbClr val="DE7A2D"/>
           </a:solidFill>
           <a:ln>
             <a:noFill/>
           </a:ln>
+          <a:effectLst/>
         </p:spPr>
         <p:style>
           <a:lnRef idx="1">
@@ -4771,8 +6989,8 @@
         </p:nvSpPr>
         <p:spPr>
           <a:xfrm>
-            <a:off x="640080" y="1371600"/>
-            <a:ext cx="5120640" cy="4754880"/>
+            <a:off x="640080" y="1463040"/>
+            <a:ext cx="5029200" cy="3108960"/>
           </a:xfrm>
           <a:prstGeom prst="rect">
             <a:avLst/>
@@ -4786,66 +7004,171 @@
           <a:lstStyle/>
           <a:p>
             <a:pPr marL="171450" indent="-171450">
-              <a:spcBef>
+              <a:lnSpc>
+                <a:spcPct val="108000"/>
+              </a:lnSpc>
+              <a:spcAft>
+                <a:spcPts val="1000"/>
+              </a:spcAft>
+              <a:buChar char="•"/>
+            </a:pPr>
+            <a:r>
+              <a:rPr sz="1600" b="0" i="0">
+                <a:solidFill>
+                  <a:srgbClr val="33231C"/>
+                </a:solidFill>
+                <a:latin typeface="Noto Sans"/>
+              </a:rPr>
+              <a:t>Gempa dangkal (&lt;70 km): 6.841 kejadian (71,3%). Menengah: 2.439 (25,4%). Dalam (&gt;300 km): 315 (3,3%).</a:t>
+            </a:r>
+          </a:p>
+          <a:p>
+            <a:pPr marL="171450" indent="-171450">
+              <a:lnSpc>
+                <a:spcPct val="108000"/>
+              </a:lnSpc>
+              <a:spcAft>
+                <a:spcPts val="1000"/>
+              </a:spcAft>
+              <a:buChar char="•"/>
+            </a:pPr>
+            <a:r>
+              <a:rPr sz="1600" b="0" i="0">
+                <a:solidFill>
+                  <a:srgbClr val="33231C"/>
+                </a:solidFill>
+                <a:latin typeface="Noto Sans"/>
+              </a:rPr>
+              <a:t>Gempa dangkal lebih berpotensi merusak: energi dilepas dekat permukaan dan permukiman. Kedalaman median katalog hanya 36,2 km.</a:t>
+            </a:r>
+          </a:p>
+          <a:p>
+            <a:pPr marL="171450" indent="-171450">
+              <a:lnSpc>
+                <a:spcPct val="108000"/>
+              </a:lnSpc>
+              <a:spcAft>
+                <a:spcPts val="1000"/>
+              </a:spcAft>
+              <a:buChar char="•"/>
+            </a:pPr>
+            <a:r>
+              <a:rPr sz="1600" b="0" i="0">
+                <a:solidFill>
+                  <a:srgbClr val="33231C"/>
+                </a:solidFill>
+                <a:latin typeface="Noto Sans"/>
+              </a:rPr>
+              <a:t>Kombinasi paling waspada: dangkal sekaligus M≥6, terjadi 106 kali dalam 12 tahun, kira-kira 9 kali per tahun.</a:t>
+            </a:r>
+          </a:p>
+        </p:txBody>
+      </p:sp>
+      <p:sp>
+        <p:nvSpPr>
+          <p:cNvPr id="5" name="TextBox 4"/>
+          <p:cNvSpPr txBox="1"/>
+          <p:nvPr/>
+        </p:nvSpPr>
+        <p:spPr>
+          <a:xfrm>
+            <a:off x="640080" y="4754880"/>
+            <a:ext cx="5029200" cy="1371600"/>
+          </a:xfrm>
+          <a:prstGeom prst="rect">
+            <a:avLst/>
+          </a:prstGeom>
+          <a:noFill/>
+        </p:spPr>
+        <p:txBody>
+          <a:bodyPr wrap="square">
+            <a:spAutoFit/>
+          </a:bodyPr>
+          <a:lstStyle/>
+          <a:p>
+            <a:pPr>
+              <a:spcAft>
                 <a:spcPts val="200"/>
-              </a:spcBef>
-              <a:spcAft>
-                <a:spcPts val="1000"/>
-              </a:spcAft>
-              <a:buChar char="•"/>
-            </a:pPr>
-            <a:r>
-              <a:rPr sz="1700" b="0" i="0">
-                <a:solidFill>
-                  <a:srgbClr val="1F2937"/>
-                </a:solidFill>
-              </a:rPr>
-              <a:t>Gempa dangkal (&lt;70 km): 6.841 kejadian (71.3%). Menengah: 2.439 (25.4%). Dalam (&gt;300 km): 315 (3.3%).</a:t>
-            </a:r>
-          </a:p>
-          <a:p>
-            <a:pPr marL="171450" indent="-171450">
-              <a:spcBef>
-                <a:spcPts val="200"/>
-              </a:spcBef>
-              <a:spcAft>
-                <a:spcPts val="1000"/>
-              </a:spcAft>
-              <a:buChar char="•"/>
-            </a:pPr>
-            <a:r>
-              <a:rPr sz="1700" b="0" i="0">
-                <a:solidFill>
-                  <a:srgbClr val="1F2937"/>
-                </a:solidFill>
-              </a:rPr>
-              <a:t>Gempa dangkal lebih berpotensi merusak: energi dilepas dekat permukaan dan permukiman. Kedalaman median katalog hanya 36,2 km.</a:t>
-            </a:r>
-          </a:p>
-          <a:p>
-            <a:pPr marL="171450" indent="-171450">
-              <a:spcBef>
-                <a:spcPts val="200"/>
-              </a:spcBef>
-              <a:spcAft>
-                <a:spcPts val="1000"/>
-              </a:spcAft>
-              <a:buChar char="•"/>
-            </a:pPr>
-            <a:r>
-              <a:rPr sz="1700" b="0" i="0">
-                <a:solidFill>
-                  <a:srgbClr val="1F2937"/>
-                </a:solidFill>
-              </a:rPr>
-              <a:t>Kombinasi paling waspada — dangkal sekaligus M≥6 — terjadi 106 kali dalam 12 tahun, kira-kira 9 kali per tahun.</a:t>
-            </a:r>
+              </a:spcAft>
+            </a:pPr>
+            <a:r>
+              <a:rPr sz="4000" b="1" i="0">
+                <a:solidFill>
+                  <a:srgbClr val="A34A38"/>
+                </a:solidFill>
+                <a:latin typeface="Noto Sans"/>
+              </a:rPr>
+              <a:t>71,3%</a:t>
+            </a:r>
+          </a:p>
+          <a:p>
+            <a:pPr>
+              <a:lnSpc>
+                <a:spcPct val="110000"/>
+              </a:lnSpc>
+              <a:spcAft>
+                <a:spcPts val="0"/>
+              </a:spcAft>
+            </a:pPr>
+            <a:r>
+              <a:rPr sz="1150" b="1" i="0">
+                <a:solidFill>
+                  <a:srgbClr val="33231C"/>
+                </a:solidFill>
+                <a:latin typeface="Noto Sans"/>
+              </a:rPr>
+              <a:t>GEMPA DANGKAL (&lt;70 KM): 6.841 DARI 9.595 KEJADIAN</a:t>
+            </a:r>
+          </a:p>
+        </p:txBody>
+      </p:sp>
+      <p:sp>
+        <p:nvSpPr>
+          <p:cNvPr id="6" name="Rectangle 5"/>
+          <p:cNvSpPr/>
+          <p:nvPr/>
+        </p:nvSpPr>
+        <p:spPr>
+          <a:xfrm>
+            <a:off x="5989320" y="1463040"/>
+            <a:ext cx="5559552" cy="4206240"/>
+          </a:xfrm>
+          <a:prstGeom prst="rect">
+            <a:avLst/>
+          </a:prstGeom>
+          <a:solidFill>
+            <a:srgbClr val="F8F2E5"/>
+          </a:solidFill>
+          <a:ln>
+            <a:noFill/>
+          </a:ln>
+          <a:effectLst/>
+        </p:spPr>
+        <p:style>
+          <a:lnRef idx="1">
+            <a:schemeClr val="accent1"/>
+          </a:lnRef>
+          <a:fillRef idx="3">
+            <a:schemeClr val="accent1"/>
+          </a:fillRef>
+          <a:effectRef idx="2">
+            <a:schemeClr val="accent1"/>
+          </a:effectRef>
+          <a:fontRef idx="minor">
+            <a:schemeClr val="lt1"/>
+          </a:fontRef>
+        </p:style>
+        <p:txBody>
+          <a:bodyPr rtlCol="0" anchor="ctr"/>
+          <a:lstStyle/>
+          <a:p>
+            <a:pPr algn="ctr"/>
           </a:p>
         </p:txBody>
       </p:sp>
       <p:pic>
         <p:nvPicPr>
-          <p:cNvPr id="5" name="Picture 4" descr="05_kelas_kedalaman.png"/>
+          <p:cNvPr id="7" name="Picture 6" descr="05_kelas_kedalaman.png"/>
           <p:cNvPicPr>
             <a:picLocks noChangeAspect="1"/>
           </p:cNvPicPr>
@@ -4859,8 +7182,8 @@
         </p:blipFill>
         <p:spPr>
           <a:xfrm>
-            <a:off x="6217920" y="1371600"/>
-            <a:ext cx="5303520" cy="2171520"/>
+            <a:off x="6126479" y="2484144"/>
+            <a:ext cx="5285232" cy="2164032"/>
           </a:xfrm>
           <a:prstGeom prst="rect">
             <a:avLst/>
@@ -4869,14 +7192,14 @@
       </p:pic>
       <p:sp>
         <p:nvSpPr>
-          <p:cNvPr id="6" name="TextBox 5"/>
+          <p:cNvPr id="8" name="TextBox 7"/>
           <p:cNvSpPr txBox="1"/>
           <p:nvPr/>
         </p:nvSpPr>
         <p:spPr>
           <a:xfrm>
-            <a:off x="640080" y="6126480"/>
-            <a:ext cx="10881360" cy="457200"/>
+            <a:off x="640080" y="6291072"/>
+            <a:ext cx="10908792" cy="365760"/>
           </a:xfrm>
           <a:prstGeom prst="rect">
             <a:avLst/>
@@ -4891,17 +7214,62 @@
           <a:p>
             <a:pPr>
               <a:spcAft>
-                <a:spcPts val="800"/>
+                <a:spcPts val="0"/>
               </a:spcAft>
             </a:pPr>
             <a:r>
               <a:rPr sz="1100" b="0" i="1">
                 <a:solidFill>
-                  <a:srgbClr val="6B7280"/>
-                </a:solidFill>
+                  <a:srgbClr val="8A7A6C"/>
+                </a:solidFill>
+                <a:latin typeface="Noto Sans"/>
               </a:rPr>
               <a:t>Chart: jumlah kejadian per kelas kedalaman.</a:t>
             </a:r>
+          </a:p>
+        </p:txBody>
+      </p:sp>
+      <p:sp>
+        <p:nvSpPr>
+          <p:cNvPr id="9" name="Rectangle 8"/>
+          <p:cNvSpPr/>
+          <p:nvPr/>
+        </p:nvSpPr>
+        <p:spPr>
+          <a:xfrm>
+            <a:off x="0" y="6748272"/>
+            <a:ext cx="12191695" cy="109728"/>
+          </a:xfrm>
+          <a:prstGeom prst="rect">
+            <a:avLst/>
+          </a:prstGeom>
+          <a:solidFill>
+            <a:srgbClr val="A34A38"/>
+          </a:solidFill>
+          <a:ln>
+            <a:noFill/>
+          </a:ln>
+          <a:effectLst/>
+        </p:spPr>
+        <p:style>
+          <a:lnRef idx="1">
+            <a:schemeClr val="accent1"/>
+          </a:lnRef>
+          <a:fillRef idx="3">
+            <a:schemeClr val="accent1"/>
+          </a:fillRef>
+          <a:effectRef idx="2">
+            <a:schemeClr val="accent1"/>
+          </a:effectRef>
+          <a:fontRef idx="minor">
+            <a:schemeClr val="lt1"/>
+          </a:fontRef>
+        </p:style>
+        <p:txBody>
+          <a:bodyPr rtlCol="0" anchor="ctr"/>
+          <a:lstStyle/>
+          <a:p>
+            <a:pPr algn="ctr"/>
           </a:p>
         </p:txBody>
       </p:sp>
@@ -4919,7 +7287,7 @@
     <p:bg>
       <p:bgPr>
         <a:solidFill>
-          <a:srgbClr val="FFFFFF"/>
+          <a:srgbClr val="F1E9DA"/>
         </a:solidFill>
         <a:effectLst/>
       </p:bgPr>
@@ -4939,8 +7307,8 @@
         </p:nvSpPr>
         <p:spPr>
           <a:xfrm>
-            <a:off x="640080" y="274320"/>
-            <a:ext cx="10881360" cy="822960"/>
+            <a:off x="640080" y="384048"/>
+            <a:ext cx="10908792" cy="777240"/>
           </a:xfrm>
           <a:prstGeom prst="rect">
             <a:avLst/>
@@ -4955,16 +7323,17 @@
           <a:p>
             <a:pPr>
               <a:spcAft>
-                <a:spcPts val="800"/>
-              </a:spcAft>
-            </a:pPr>
-            <a:r>
-              <a:rPr sz="3000" b="1" i="0">
-                <a:solidFill>
-                  <a:srgbClr val="1E3A8A"/>
-                </a:solidFill>
-              </a:rPr>
-              <a:t>Peta Sebaran dan Wilayah Teraktif</a:t>
+                <a:spcPts val="0"/>
+              </a:spcAft>
+            </a:pPr>
+            <a:r>
+              <a:rPr sz="3100" b="1" i="0">
+                <a:solidFill>
+                  <a:srgbClr val="33231C"/>
+                </a:solidFill>
+                <a:latin typeface="Noto Sans"/>
+              </a:rPr>
+              <a:t>PETA SEBARAN DAN WILAYAH TERAKTIF</a:t>
             </a:r>
           </a:p>
         </p:txBody>
@@ -4977,18 +7346,19 @@
         </p:nvSpPr>
         <p:spPr>
           <a:xfrm>
-            <a:off x="640080" y="1051560"/>
-            <a:ext cx="1371600" cy="54864"/>
+            <a:off x="658368" y="1188720"/>
+            <a:ext cx="1371600" cy="82296"/>
           </a:xfrm>
           <a:prstGeom prst="rect">
             <a:avLst/>
           </a:prstGeom>
           <a:solidFill>
-            <a:srgbClr val="0E7C7B"/>
+            <a:srgbClr val="A34A38"/>
           </a:solidFill>
           <a:ln>
             <a:noFill/>
           </a:ln>
+          <a:effectLst/>
         </p:spPr>
         <p:style>
           <a:lnRef idx="1">
@@ -5020,8 +7390,8 @@
         </p:nvSpPr>
         <p:spPr>
           <a:xfrm>
-            <a:off x="640080" y="1371600"/>
-            <a:ext cx="5120640" cy="4754880"/>
+            <a:off x="640080" y="1463040"/>
+            <a:ext cx="4526280" cy="4572000"/>
           </a:xfrm>
           <a:prstGeom prst="rect">
             <a:avLst/>
@@ -5035,66 +7405,113 @@
           <a:lstStyle/>
           <a:p>
             <a:pPr marL="171450" indent="-171450">
-              <a:spcBef>
-                <a:spcPts val="200"/>
-              </a:spcBef>
+              <a:lnSpc>
+                <a:spcPct val="108000"/>
+              </a:lnSpc>
               <a:spcAft>
                 <a:spcPts val="1000"/>
               </a:spcAft>
               <a:buChar char="•"/>
             </a:pPr>
             <a:r>
-              <a:rPr sz="1700" b="0" i="0">
-                <a:solidFill>
-                  <a:srgbClr val="1F2937"/>
-                </a:solidFill>
-              </a:rPr>
-              <a:t>Wilayah teraktif: Halmahera &amp; Maluku Utara — 2.061 kejadian, magnitudo maks M7.4. Zona tumbukan Laut Maluku memang salah satu kawasan seismik paling aktif di dunia.</a:t>
+              <a:rPr sz="1500" b="0" i="0">
+                <a:solidFill>
+                  <a:srgbClr val="33231C"/>
+                </a:solidFill>
+                <a:latin typeface="Noto Sans"/>
+              </a:rPr>
+              <a:t>Wilayah teraktif: Halmahera &amp; Maluku Utara, 2.061 kejadian, magnitudo maks M7,4. Zona tumbukan Laut Maluku memang salah satu kawasan seismik paling aktif di dunia.</a:t>
             </a:r>
           </a:p>
           <a:p>
             <a:pPr marL="171450" indent="-171450">
-              <a:spcBef>
-                <a:spcPts val="200"/>
-              </a:spcBef>
+              <a:lnSpc>
+                <a:spcPct val="108000"/>
+              </a:lnSpc>
               <a:spcAft>
                 <a:spcPts val="1000"/>
               </a:spcAft>
               <a:buChar char="•"/>
             </a:pPr>
             <a:r>
-              <a:rPr sz="1700" b="0" i="0">
-                <a:solidFill>
-                  <a:srgbClr val="1F2937"/>
-                </a:solidFill>
-              </a:rPr>
-              <a:t>Menyusul: Sumatera (1.514), Papua (1.108), Sulawesi (1.061). Kalimantan hanya 15 kejadian — jauh dari batas lempeng, nyaris bebas gempa.</a:t>
+              <a:rPr sz="1500" b="0" i="0">
+                <a:solidFill>
+                  <a:srgbClr val="33231C"/>
+                </a:solidFill>
+                <a:latin typeface="Noto Sans"/>
+              </a:rPr>
+              <a:t>Menyusul: Sumatera (1.514), Papua (1.108), Sulawesi (1.061). Kalimantan hanya 15 kejadian: jauh dari batas lempeng, nyaris bebas gempa.</a:t>
             </a:r>
           </a:p>
           <a:p>
             <a:pPr marL="171450" indent="-171450">
-              <a:spcBef>
-                <a:spcPts val="200"/>
-              </a:spcBef>
+              <a:lnSpc>
+                <a:spcPct val="108000"/>
+              </a:lnSpc>
               <a:spcAft>
                 <a:spcPts val="1000"/>
               </a:spcAft>
               <a:buChar char="•"/>
             </a:pPr>
             <a:r>
-              <a:rPr sz="1700" b="0" i="0">
-                <a:solidFill>
-                  <a:srgbClr val="1F2937"/>
-                </a:solidFill>
+              <a:rPr sz="1500" b="0" i="0">
+                <a:solidFill>
+                  <a:srgbClr val="33231C"/>
+                </a:solidFill>
+                <a:latin typeface="Noto Sans"/>
               </a:rPr>
               <a:t>Pola peta memperlihatkan jalur busur kepulauan: gempa menumpuk mengikuti garis subduksi dari barat Sumatera, selatan Jawa, sampai Banda dan Maluku.</a:t>
             </a:r>
+          </a:p>
+        </p:txBody>
+      </p:sp>
+      <p:sp>
+        <p:nvSpPr>
+          <p:cNvPr id="5" name="Rectangle 4"/>
+          <p:cNvSpPr/>
+          <p:nvPr/>
+        </p:nvSpPr>
+        <p:spPr>
+          <a:xfrm>
+            <a:off x="5349240" y="1463040"/>
+            <a:ext cx="6199632" cy="4206240"/>
+          </a:xfrm>
+          <a:prstGeom prst="rect">
+            <a:avLst/>
+          </a:prstGeom>
+          <a:solidFill>
+            <a:srgbClr val="F8F2E5"/>
+          </a:solidFill>
+          <a:ln>
+            <a:noFill/>
+          </a:ln>
+          <a:effectLst/>
+        </p:spPr>
+        <p:style>
+          <a:lnRef idx="1">
+            <a:schemeClr val="accent1"/>
+          </a:lnRef>
+          <a:fillRef idx="3">
+            <a:schemeClr val="accent1"/>
+          </a:fillRef>
+          <a:effectRef idx="2">
+            <a:schemeClr val="accent1"/>
+          </a:effectRef>
+          <a:fontRef idx="minor">
+            <a:schemeClr val="lt1"/>
+          </a:fontRef>
+        </p:style>
+        <p:txBody>
+          <a:bodyPr rtlCol="0" anchor="ctr"/>
+          <a:lstStyle/>
+          <a:p>
+            <a:pPr algn="ctr"/>
           </a:p>
         </p:txBody>
       </p:sp>
       <p:pic>
         <p:nvPicPr>
-          <p:cNvPr id="5" name="Picture 4" descr="08_peta_sebaran.png"/>
+          <p:cNvPr id="6" name="Picture 5" descr="08_peta_sebaran.png"/>
           <p:cNvPicPr>
             <a:picLocks noChangeAspect="1"/>
           </p:cNvPicPr>
@@ -5108,8 +7525,8 @@
         </p:blipFill>
         <p:spPr>
           <a:xfrm>
-            <a:off x="6217920" y="1371600"/>
-            <a:ext cx="5303520" cy="2450592"/>
+            <a:off x="5486400" y="2138117"/>
+            <a:ext cx="5925312" cy="2856085"/>
           </a:xfrm>
           <a:prstGeom prst="rect">
             <a:avLst/>
@@ -5118,14 +7535,14 @@
       </p:pic>
       <p:sp>
         <p:nvSpPr>
-          <p:cNvPr id="6" name="TextBox 5"/>
+          <p:cNvPr id="7" name="TextBox 6"/>
           <p:cNvSpPr txBox="1"/>
           <p:nvPr/>
         </p:nvSpPr>
         <p:spPr>
           <a:xfrm>
-            <a:off x="640080" y="6126480"/>
-            <a:ext cx="10881360" cy="457200"/>
+            <a:off x="640080" y="6291072"/>
+            <a:ext cx="10908792" cy="365760"/>
           </a:xfrm>
           <a:prstGeom prst="rect">
             <a:avLst/>
@@ -5140,17 +7557,62 @@
           <a:p>
             <a:pPr>
               <a:spcAft>
-                <a:spcPts val="800"/>
+                <a:spcPts val="0"/>
               </a:spcAft>
             </a:pPr>
             <a:r>
               <a:rPr sz="1100" b="0" i="1">
                 <a:solidFill>
-                  <a:srgbClr val="6B7280"/>
-                </a:solidFill>
-              </a:rPr>
-              <a:t>Chart: peta sebaran — ukuran titik = magnitudo, warna = kelas kedalaman.</a:t>
-            </a:r>
+                  <a:srgbClr val="8A7A6C"/>
+                </a:solidFill>
+                <a:latin typeface="Noto Sans"/>
+              </a:rPr>
+              <a:t>Chart: peta sebaran, ukuran titik = magnitudo, warna = kelas kedalaman.</a:t>
+            </a:r>
+          </a:p>
+        </p:txBody>
+      </p:sp>
+      <p:sp>
+        <p:nvSpPr>
+          <p:cNvPr id="8" name="Rectangle 7"/>
+          <p:cNvSpPr/>
+          <p:nvPr/>
+        </p:nvSpPr>
+        <p:spPr>
+          <a:xfrm>
+            <a:off x="0" y="6748272"/>
+            <a:ext cx="12191695" cy="109728"/>
+          </a:xfrm>
+          <a:prstGeom prst="rect">
+            <a:avLst/>
+          </a:prstGeom>
+          <a:solidFill>
+            <a:srgbClr val="A34A38"/>
+          </a:solidFill>
+          <a:ln>
+            <a:noFill/>
+          </a:ln>
+          <a:effectLst/>
+        </p:spPr>
+        <p:style>
+          <a:lnRef idx="1">
+            <a:schemeClr val="accent1"/>
+          </a:lnRef>
+          <a:fillRef idx="3">
+            <a:schemeClr val="accent1"/>
+          </a:fillRef>
+          <a:effectRef idx="2">
+            <a:schemeClr val="accent1"/>
+          </a:effectRef>
+          <a:fontRef idx="minor">
+            <a:schemeClr val="lt1"/>
+          </a:fontRef>
+        </p:style>
+        <p:txBody>
+          <a:bodyPr rtlCol="0" anchor="ctr"/>
+          <a:lstStyle/>
+          <a:p>
+            <a:pPr algn="ctr"/>
           </a:p>
         </p:txBody>
       </p:sp>
@@ -5168,7 +7630,7 @@
     <p:bg>
       <p:bgPr>
         <a:solidFill>
-          <a:srgbClr val="FFFFFF"/>
+          <a:srgbClr val="F1E9DA"/>
         </a:solidFill>
         <a:effectLst/>
       </p:bgPr>
@@ -5188,8 +7650,8 @@
         </p:nvSpPr>
         <p:spPr>
           <a:xfrm>
-            <a:off x="640080" y="274320"/>
-            <a:ext cx="10881360" cy="822960"/>
+            <a:off x="640080" y="384048"/>
+            <a:ext cx="10908792" cy="777240"/>
           </a:xfrm>
           <a:prstGeom prst="rect">
             <a:avLst/>
@@ -5204,16 +7666,17 @@
           <a:p>
             <a:pPr>
               <a:spcAft>
-                <a:spcPts val="800"/>
-              </a:spcAft>
-            </a:pPr>
-            <a:r>
-              <a:rPr sz="3000" b="1" i="0">
-                <a:solidFill>
-                  <a:srgbClr val="1E3A8A"/>
-                </a:solidFill>
-              </a:rPr>
-              <a:t>Snapshot BMKG: Oktober 2026</a:t>
+                <a:spcPts val="0"/>
+              </a:spcAft>
+            </a:pPr>
+            <a:r>
+              <a:rPr sz="3100" b="1" i="0">
+                <a:solidFill>
+                  <a:srgbClr val="33231C"/>
+                </a:solidFill>
+                <a:latin typeface="Noto Sans"/>
+              </a:rPr>
+              <a:t>SNAPSHOT BMKG: OKTOBER 2026</a:t>
             </a:r>
           </a:p>
         </p:txBody>
@@ -5226,18 +7689,19 @@
         </p:nvSpPr>
         <p:spPr>
           <a:xfrm>
-            <a:off x="640080" y="1051560"/>
-            <a:ext cx="1371600" cy="54864"/>
+            <a:off x="658368" y="1188720"/>
+            <a:ext cx="1371600" cy="82296"/>
           </a:xfrm>
           <a:prstGeom prst="rect">
             <a:avLst/>
           </a:prstGeom>
           <a:solidFill>
-            <a:srgbClr val="0E7C7B"/>
+            <a:srgbClr val="DE7A2D"/>
           </a:solidFill>
           <a:ln>
             <a:noFill/>
           </a:ln>
+          <a:effectLst/>
         </p:spPr>
         <p:style>
           <a:lnRef idx="1">
@@ -5263,81 +7727,45 @@
       </p:sp>
       <p:sp>
         <p:nvSpPr>
-          <p:cNvPr id="4" name="TextBox 3"/>
-          <p:cNvSpPr txBox="1"/>
-          <p:nvPr/>
-        </p:nvSpPr>
-        <p:spPr>
-          <a:xfrm>
-            <a:off x="640080" y="1371600"/>
-            <a:ext cx="5120640" cy="4754880"/>
-          </a:xfrm>
-          <a:prstGeom prst="rect">
-            <a:avLst/>
-          </a:prstGeom>
-          <a:noFill/>
-        </p:spPr>
-        <p:txBody>
-          <a:bodyPr wrap="square">
-            <a:spAutoFit/>
-          </a:bodyPr>
-          <a:lstStyle/>
-          <a:p>
-            <a:pPr marL="171450" indent="-171450">
-              <a:spcBef>
-                <a:spcPts val="200"/>
-              </a:spcBef>
-              <a:spcAft>
-                <a:spcPts val="1000"/>
-              </a:spcAft>
-              <a:buChar char="•"/>
-            </a:pPr>
-            <a:r>
-              <a:rPr sz="1700" b="0" i="0">
-                <a:solidFill>
-                  <a:srgbClr val="1F2937"/>
-                </a:solidFill>
-              </a:rPr>
-              <a:t>Dalam 18 hari pertama Oktober 2026 saja, BMKG mencatat 10 gempa M5+ — termasuk M6,1 di Kodi, Sumba Barat Daya (4 Okt) dan M5,8 di Tahuna, Kep. Sangihe (8 Okt).</a:t>
-            </a:r>
-          </a:p>
-          <a:p>
-            <a:pPr marL="171450" indent="-171450">
-              <a:spcBef>
-                <a:spcPts val="200"/>
-              </a:spcBef>
-              <a:spcAft>
-                <a:spcPts val="1000"/>
-              </a:spcAft>
-              <a:buChar char="•"/>
-            </a:pPr>
-            <a:r>
-              <a:rPr sz="1700" b="0" i="0">
-                <a:solidFill>
-                  <a:srgbClr val="1F2937"/>
-                </a:solidFill>
-              </a:rPr>
-              <a:t>Dua gempa M5,7 berurutan: Sukabumi, Jawa Barat (11 Okt, dangkal 10 km) dan Pohuwato, Gorontalo (12 Okt). Terakhir di daftar: M5,3 Labuan Bajo, NTT (18 Okt).</a:t>
-            </a:r>
-          </a:p>
-          <a:p>
-            <a:pPr marL="171450" indent="-171450">
-              <a:spcBef>
-                <a:spcPts val="200"/>
-              </a:spcBef>
-              <a:spcAft>
-                <a:spcPts val="1000"/>
-              </a:spcAft>
-              <a:buChar char="•"/>
-            </a:pPr>
-            <a:r>
-              <a:rPr sz="1700" b="0" i="0">
-                <a:solidFill>
-                  <a:srgbClr val="1F2937"/>
-                </a:solidFill>
-              </a:rPr>
-              <a:t>Gempa terbaru saat data diambil: M3.7 di perairan Pulau Saringi (20 Okt, 18:28 WIB) — dirasakan III di Kabupaten Sumbawa. Bukti bahwa katalog ini hidup: gempa terjadi bahkan saat analisis dikerjakan.</a:t>
-            </a:r>
+          <p:cNvPr id="4" name="Rectangle 3"/>
+          <p:cNvSpPr/>
+          <p:nvPr/>
+        </p:nvSpPr>
+        <p:spPr>
+          <a:xfrm>
+            <a:off x="640080" y="1463040"/>
+            <a:ext cx="5559552" cy="3017520"/>
+          </a:xfrm>
+          <a:prstGeom prst="rect">
+            <a:avLst/>
+          </a:prstGeom>
+          <a:solidFill>
+            <a:srgbClr val="F8F2E5"/>
+          </a:solidFill>
+          <a:ln>
+            <a:noFill/>
+          </a:ln>
+          <a:effectLst/>
+        </p:spPr>
+        <p:style>
+          <a:lnRef idx="1">
+            <a:schemeClr val="accent1"/>
+          </a:lnRef>
+          <a:fillRef idx="3">
+            <a:schemeClr val="accent1"/>
+          </a:fillRef>
+          <a:effectRef idx="2">
+            <a:schemeClr val="accent1"/>
+          </a:effectRef>
+          <a:fontRef idx="minor">
+            <a:schemeClr val="lt1"/>
+          </a:fontRef>
+        </p:style>
+        <p:txBody>
+          <a:bodyPr rtlCol="0" anchor="ctr"/>
+          <a:lstStyle/>
+          <a:p>
+            <a:pPr algn="ctr"/>
           </a:p>
         </p:txBody>
       </p:sp>
@@ -5357,8 +7785,8 @@
         </p:blipFill>
         <p:spPr>
           <a:xfrm>
-            <a:off x="6217920" y="1371600"/>
-            <a:ext cx="5303520" cy="1985661"/>
+            <a:off x="777239" y="1913213"/>
+            <a:ext cx="5285232" cy="2117172"/>
           </a:xfrm>
           <a:prstGeom prst="rect">
             <a:avLst/>
@@ -5367,14 +7795,58 @@
       </p:pic>
       <p:sp>
         <p:nvSpPr>
-          <p:cNvPr id="6" name="TextBox 5"/>
+          <p:cNvPr id="6" name="Rectangle 5"/>
+          <p:cNvSpPr/>
+          <p:nvPr/>
+        </p:nvSpPr>
+        <p:spPr>
+          <a:xfrm>
+            <a:off x="640080" y="4663440"/>
+            <a:ext cx="5559552" cy="1188720"/>
+          </a:xfrm>
+          <a:prstGeom prst="rect">
+            <a:avLst/>
+          </a:prstGeom>
+          <a:solidFill>
+            <a:srgbClr val="A34A38"/>
+          </a:solidFill>
+          <a:ln>
+            <a:noFill/>
+          </a:ln>
+          <a:effectLst/>
+        </p:spPr>
+        <p:style>
+          <a:lnRef idx="1">
+            <a:schemeClr val="accent1"/>
+          </a:lnRef>
+          <a:fillRef idx="3">
+            <a:schemeClr val="accent1"/>
+          </a:fillRef>
+          <a:effectRef idx="2">
+            <a:schemeClr val="accent1"/>
+          </a:effectRef>
+          <a:fontRef idx="minor">
+            <a:schemeClr val="lt1"/>
+          </a:fontRef>
+        </p:style>
+        <p:txBody>
+          <a:bodyPr rtlCol="0" anchor="ctr"/>
+          <a:lstStyle/>
+          <a:p>
+            <a:pPr algn="ctr"/>
+          </a:p>
+        </p:txBody>
+      </p:sp>
+      <p:sp>
+        <p:nvSpPr>
+          <p:cNvPr id="7" name="TextBox 6"/>
           <p:cNvSpPr txBox="1"/>
           <p:nvPr/>
         </p:nvSpPr>
         <p:spPr>
           <a:xfrm>
-            <a:off x="640080" y="6126480"/>
-            <a:ext cx="10881360" cy="457200"/>
+            <a:off x="868680" y="4791455"/>
+            <a:ext cx="5102352" cy="932688"/>
           </a:xfrm>
           <a:prstGeom prst="rect">
             <a:avLst/>
@@ -5389,17 +7861,203 @@
           <a:p>
             <a:pPr>
               <a:spcAft>
-                <a:spcPts val="800"/>
+                <a:spcPts val="200"/>
+              </a:spcAft>
+            </a:pPr>
+            <a:r>
+              <a:rPr sz="3000" b="1" i="0">
+                <a:solidFill>
+                  <a:srgbClr val="FFFFFF"/>
+                </a:solidFill>
+                <a:latin typeface="Noto Sans"/>
+              </a:rPr>
+              <a:t>M6,1</a:t>
+            </a:r>
+          </a:p>
+          <a:p>
+            <a:pPr>
+              <a:lnSpc>
+                <a:spcPct val="105000"/>
+              </a:lnSpc>
+              <a:spcAft>
+                <a:spcPts val="0"/>
+              </a:spcAft>
+            </a:pPr>
+            <a:r>
+              <a:rPr sz="1100" b="1" i="0">
+                <a:solidFill>
+                  <a:srgbClr val="FFFFFF"/>
+                </a:solidFill>
+                <a:latin typeface="Noto Sans"/>
+              </a:rPr>
+              <a:t>TERBESAR OKTOBER 2026: KODI, SUMBA BARAT DAYA (4 OKT)</a:t>
+            </a:r>
+          </a:p>
+        </p:txBody>
+      </p:sp>
+      <p:sp>
+        <p:nvSpPr>
+          <p:cNvPr id="8" name="TextBox 7"/>
+          <p:cNvSpPr txBox="1"/>
+          <p:nvPr/>
+        </p:nvSpPr>
+        <p:spPr>
+          <a:xfrm>
+            <a:off x="6492240" y="1463040"/>
+            <a:ext cx="5056632" cy="4480560"/>
+          </a:xfrm>
+          <a:prstGeom prst="rect">
+            <a:avLst/>
+          </a:prstGeom>
+          <a:noFill/>
+        </p:spPr>
+        <p:txBody>
+          <a:bodyPr wrap="square">
+            <a:spAutoFit/>
+          </a:bodyPr>
+          <a:lstStyle/>
+          <a:p>
+            <a:pPr marL="171450" indent="-171450">
+              <a:lnSpc>
+                <a:spcPct val="108000"/>
+              </a:lnSpc>
+              <a:spcAft>
+                <a:spcPts val="1000"/>
+              </a:spcAft>
+              <a:buChar char="•"/>
+            </a:pPr>
+            <a:r>
+              <a:rPr sz="1600" b="0" i="0">
+                <a:solidFill>
+                  <a:srgbClr val="33231C"/>
+                </a:solidFill>
+                <a:latin typeface="Noto Sans"/>
+              </a:rPr>
+              <a:t>Dalam 18 hari pertama Oktober 2026 saja, BMKG mencatat 10 gempa M5+, termasuk M6,1 di Kodi, Sumba Barat Daya (4 Okt) dan M5,8 di Tahuna, Kep. Sangihe (8 Okt).</a:t>
+            </a:r>
+          </a:p>
+          <a:p>
+            <a:pPr marL="171450" indent="-171450">
+              <a:lnSpc>
+                <a:spcPct val="108000"/>
+              </a:lnSpc>
+              <a:spcAft>
+                <a:spcPts val="1000"/>
+              </a:spcAft>
+              <a:buChar char="•"/>
+            </a:pPr>
+            <a:r>
+              <a:rPr sz="1600" b="0" i="0">
+                <a:solidFill>
+                  <a:srgbClr val="33231C"/>
+                </a:solidFill>
+                <a:latin typeface="Noto Sans"/>
+              </a:rPr>
+              <a:t>Dua gempa M5,7 berurutan: Sukabumi, Jawa Barat (11 Okt, dangkal 10 km) dan Pohuwato, Gorontalo (12 Okt). Terakhir di daftar: M5,3 Labuan Bajo, NTT (18 Okt).</a:t>
+            </a:r>
+          </a:p>
+          <a:p>
+            <a:pPr marL="171450" indent="-171450">
+              <a:lnSpc>
+                <a:spcPct val="108000"/>
+              </a:lnSpc>
+              <a:spcAft>
+                <a:spcPts val="1000"/>
+              </a:spcAft>
+              <a:buChar char="•"/>
+            </a:pPr>
+            <a:r>
+              <a:rPr sz="1600" b="0" i="0">
+                <a:solidFill>
+                  <a:srgbClr val="33231C"/>
+                </a:solidFill>
+                <a:latin typeface="Noto Sans"/>
+              </a:rPr>
+              <a:t>Gempa terbaru saat data diambil: M3,7 di perairan Pulau Saringi (20 Okt, 18:28 WIB), dirasakan III di Kabupaten Sumbawa. Bukti bahwa katalog ini hidup: gempa terjadi bahkan saat analisis dikerjakan.</a:t>
+            </a:r>
+          </a:p>
+        </p:txBody>
+      </p:sp>
+      <p:sp>
+        <p:nvSpPr>
+          <p:cNvPr id="9" name="TextBox 8"/>
+          <p:cNvSpPr txBox="1"/>
+          <p:nvPr/>
+        </p:nvSpPr>
+        <p:spPr>
+          <a:xfrm>
+            <a:off x="640080" y="6291072"/>
+            <a:ext cx="10908792" cy="365760"/>
+          </a:xfrm>
+          <a:prstGeom prst="rect">
+            <a:avLst/>
+          </a:prstGeom>
+          <a:noFill/>
+        </p:spPr>
+        <p:txBody>
+          <a:bodyPr wrap="square">
+            <a:spAutoFit/>
+          </a:bodyPr>
+          <a:lstStyle/>
+          <a:p>
+            <a:pPr>
+              <a:spcAft>
+                <a:spcPts val="0"/>
               </a:spcAft>
             </a:pPr>
             <a:r>
               <a:rPr sz="1100" b="0" i="1">
                 <a:solidFill>
-                  <a:srgbClr val="6B7280"/>
-                </a:solidFill>
+                  <a:srgbClr val="8A7A6C"/>
+                </a:solidFill>
+                <a:latin typeface="Noto Sans"/>
               </a:rPr>
               <a:t>Chart: 15 gempa M5+ terbaru versi BMKG (snapshot 20 Oktober 2026).</a:t>
             </a:r>
+          </a:p>
+        </p:txBody>
+      </p:sp>
+      <p:sp>
+        <p:nvSpPr>
+          <p:cNvPr id="10" name="Rectangle 9"/>
+          <p:cNvSpPr/>
+          <p:nvPr/>
+        </p:nvSpPr>
+        <p:spPr>
+          <a:xfrm>
+            <a:off x="0" y="6748272"/>
+            <a:ext cx="12191695" cy="109728"/>
+          </a:xfrm>
+          <a:prstGeom prst="rect">
+            <a:avLst/>
+          </a:prstGeom>
+          <a:solidFill>
+            <a:srgbClr val="A34A38"/>
+          </a:solidFill>
+          <a:ln>
+            <a:noFill/>
+          </a:ln>
+          <a:effectLst/>
+        </p:spPr>
+        <p:style>
+          <a:lnRef idx="1">
+            <a:schemeClr val="accent1"/>
+          </a:lnRef>
+          <a:fillRef idx="3">
+            <a:schemeClr val="accent1"/>
+          </a:fillRef>
+          <a:effectRef idx="2">
+            <a:schemeClr val="accent1"/>
+          </a:effectRef>
+          <a:fontRef idx="minor">
+            <a:schemeClr val="lt1"/>
+          </a:fontRef>
+        </p:style>
+        <p:txBody>
+          <a:bodyPr rtlCol="0" anchor="ctr"/>
+          <a:lstStyle/>
+          <a:p>
+            <a:pPr algn="ctr"/>
           </a:p>
         </p:txBody>
       </p:sp>

--- a/Portofolio-Analisis-Gempa-Bumi.pptx
+++ b/Portofolio-Analisis-Gempa-Bumi.pptx
@@ -3222,7 +3222,7 @@
                 </a:solidFill>
                 <a:latin typeface="Noto Sans"/>
               </a:rPr>
-              <a:t>9.595</a:t>
+              <a:t>9.600</a:t>
             </a:r>
           </a:p>
         </p:txBody>
@@ -3407,7 +3407,7 @@
                 </a:solidFill>
                 <a:latin typeface="Noto Sans"/>
               </a:rPr>
-              <a:t>SNAPSHOT BMKG: 20 OKTOBER 2026</a:t>
+              <a:t>SNAPSHOT BMKG: 24 OKTOBER 2026</a:t>
             </a:r>
           </a:p>
         </p:txBody>
@@ -3590,7 +3590,7 @@
                 </a:solidFill>
                 <a:latin typeface="Noto Sans"/>
               </a:rPr>
-              <a:t>Katalog USGS 9.595 gempa M≥4,5, 1 Januari 2015 sampai 20 Oktober 2026, plus snapshot real-time BMKG.</a:t>
+              <a:t>Katalog USGS 9.600 gempa M≥4,5, 1 Januari 2015 sampai 24 Oktober 2026, plus snapshot real-time BMKG.</a:t>
             </a:r>
           </a:p>
           <a:p>
@@ -4766,7 +4766,7 @@
                 </a:solidFill>
                 <a:latin typeface="Noto Sans"/>
               </a:rPr>
-              <a:t>Sumber data: USGS FDSN Event API (katalog historis) dan BMKG TEWS (snapshot real-time), diambil 20 Oktober 2026.</a:t>
+              <a:t>Sumber data: USGS FDSN Event API (katalog historis) dan BMKG TEWS (snapshot real-time), diambil 24 Oktober 2026.</a:t>
             </a:r>
           </a:p>
         </p:txBody>
@@ -4962,7 +4962,7 @@
                 </a:solidFill>
                 <a:latin typeface="Noto Sans"/>
               </a:rPr>
-              <a:t>Katalog mentah USGS: 10.841 kejadian dalam kotak batas Indonesia (lintang -11 s.d. 6, bujur 95 s.d. 141), ambang M≥4,5. Setelah 1.246 kejadian berlabel negara lain (Filipina, Malaysia, Papua Nugini, Palau) dikeluarkan, katalog bersih berisi 9.595 kejadian.</a:t>
+              <a:t>Katalog mentah USGS: 10.847 kejadian dalam kotak batas Indonesia (lintang -11 s.d. 6, bujur 95 s.d. 141), ambang M≥4,5. Setelah 1.247 kejadian berlabel negara lain (Filipina, Malaysia, Papua Nugini, Palau) dikeluarkan, katalog bersih berisi 9.600 kejadian.</a:t>
             </a:r>
           </a:p>
           <a:p>
@@ -4982,7 +4982,7 @@
                 </a:solidFill>
                 <a:latin typeface="Noto Sans"/>
               </a:rPr>
-              <a:t>670 kejadian berlabel 'Timor Leste' dipertahankan: episentrumnya di perairan Indonesia utara/timur Pulau Timor, hanya kota acuannya yang lintas negara.</a:t>
+              <a:t>672 kejadian berlabel 'Timor Leste' dipertahankan: episentrumnya di perairan Indonesia utara/timur Pulau Timor, hanya kota acuannya yang lintas negara.</a:t>
             </a:r>
           </a:p>
           <a:p>
@@ -5105,7 +5105,7 @@
                 </a:solidFill>
                 <a:latin typeface="Noto Sans"/>
               </a:rPr>
-              <a:t>10.841</a:t>
+              <a:t>10.847</a:t>
             </a:r>
           </a:p>
           <a:p>
@@ -5207,7 +5207,7 @@
                 </a:solidFill>
                 <a:latin typeface="Noto Sans"/>
               </a:rPr>
-              <a:t>1.246</a:t>
+              <a:t>1.247</a:t>
             </a:r>
           </a:p>
           <a:p>
@@ -5309,7 +5309,7 @@
                 </a:solidFill>
                 <a:latin typeface="Noto Sans"/>
               </a:rPr>
-              <a:t>9.595</a:t>
+              <a:t>9.600</a:t>
             </a:r>
           </a:p>
           <a:p>
@@ -5564,7 +5564,7 @@
                 </a:solidFill>
                 <a:latin typeface="Noto Sans"/>
               </a:rPr>
-              <a:t>2026 baru berjalan sampai 20 Oktober tetapi sudah mencatat 982 kejadian, setara tahun penuh yang sibuk, didorong rangkaian gempa besar tahun ini.</a:t>
+              <a:t>2026 baru berjalan sampai 24 Oktober tetapi sudah mencatat 987 kejadian, setara tahun penuh yang sibuk, didorong rangkaian gempa besar tahun ini.</a:t>
             </a:r>
           </a:p>
         </p:txBody>
@@ -5993,7 +5993,7 @@
                 </a:solidFill>
                 <a:latin typeface="Noto Sans"/>
               </a:rPr>
-              <a:t>Dari 9.595 gempa: 2.233 mencapai M≥5,0, 155 mencapai M≥6,0, dan hanya 16 yang mencapai M≥7,0.</a:t>
+              <a:t>Dari 9.600 gempa: 2.234 mencapai M≥5,0, 155 mencapai M≥6,0, dan hanya 16 yang mencapai M≥7,0.</a:t>
             </a:r>
           </a:p>
           <a:p>
@@ -6116,7 +6116,7 @@
                 </a:solidFill>
                 <a:latin typeface="Noto Sans"/>
               </a:rPr>
-              <a:t>2.233</a:t>
+              <a:t>2.234</a:t>
             </a:r>
           </a:p>
           <a:p>
@@ -7019,7 +7019,7 @@
                 </a:solidFill>
                 <a:latin typeface="Noto Sans"/>
               </a:rPr>
-              <a:t>Gempa dangkal (&lt;70 km): 6.841 kejadian (71,3%). Menengah: 2.439 (25,4%). Dalam (&gt;300 km): 315 (3,3%).</a:t>
+              <a:t>Gempa dangkal (&lt;70 km): 6.844 kejadian (71,3%). Menengah: 2.441 (25,4%). Dalam (&gt;300 km): 315 (3,3%).</a:t>
             </a:r>
           </a:p>
           <a:p>
@@ -7117,7 +7117,7 @@
                 </a:solidFill>
                 <a:latin typeface="Noto Sans"/>
               </a:rPr>
-              <a:t>GEMPA DANGKAL (&lt;70 KM): 6.841 DARI 9.595 KEJADIAN</a:t>
+              <a:t>GEMPA DANGKAL (&lt;70 KM): 6.844 DARI 9.600 KEJADIAN</a:t>
             </a:r>
           </a:p>
         </p:txBody>
@@ -7440,7 +7440,7 @@
                 </a:solidFill>
                 <a:latin typeface="Noto Sans"/>
               </a:rPr>
-              <a:t>Menyusul: Sumatera (1.514), Papua (1.108), Sulawesi (1.061). Kalimantan hanya 15 kejadian: jauh dari batas lempeng, nyaris bebas gempa.</a:t>
+              <a:t>Menyusul: Sumatera (1.517), Papua (1.108), Sulawesi (1.061). Kalimantan hanya 15 kejadian: jauh dari batas lempeng, nyaris bebas gempa.</a:t>
             </a:r>
           </a:p>
           <a:p>
@@ -7933,7 +7933,7 @@
                 </a:solidFill>
                 <a:latin typeface="Noto Sans"/>
               </a:rPr>
-              <a:t>Dalam 18 hari pertama Oktober 2026 saja, BMKG mencatat 10 gempa M5+, termasuk M6,1 di Kodi, Sumba Barat Daya (4 Okt) dan M5,8 di Tahuna, Kep. Sangihe (8 Okt).</a:t>
+              <a:t>Sampai 24 Oktober 2026, daftar 15 gempa M5+ terbaru BMKG memuat 13 gempa Oktober 2026, termasuk M6,1 di Kodi, Sumba Barat Daya (4 Okt) dan M5,8 di Tahuna, Kep. Sangihe (8 Okt).</a:t>
             </a:r>
           </a:p>
           <a:p>
@@ -7953,7 +7953,7 @@
                 </a:solidFill>
                 <a:latin typeface="Noto Sans"/>
               </a:rPr>
-              <a:t>Dua gempa M5,7 berurutan: Sukabumi, Jawa Barat (11 Okt, dangkal 10 km) dan Pohuwato, Gorontalo (12 Okt). Terakhir di daftar: M5,3 Labuan Bajo, NTT (18 Okt).</a:t>
+              <a:t>Tiga gempa M5+ terbaru: M5,4 Meulaboh, Aceh Barat (20 Okt), M5,1 Maluku Barat Daya (21 Okt), dan M5,2 Lebong, Bengkulu (22 Okt). Dua gempa M5,7 bulan ini: Sukabumi, Jawa Barat (11 Okt, dangkal 10 km) dan Pohuwato, Gorontalo (12 Okt).</a:t>
             </a:r>
           </a:p>
           <a:p>
@@ -7973,7 +7973,7 @@
                 </a:solidFill>
                 <a:latin typeface="Noto Sans"/>
               </a:rPr>
-              <a:t>Gempa terbaru saat data diambil: M3,7 di perairan Pulau Saringi (20 Okt, 18:28 WIB), dirasakan III di Kabupaten Sumbawa. Bukti bahwa katalog ini hidup: gempa terjadi bahkan saat analisis dikerjakan.</a:t>
+              <a:t>Gempa terbaru saat data diambil: M5,2 di darat 6 km Barat Laut Lebong, Bengkulu (22 Okt, 17:57 WIB), dirasakan III di Kota Bengkulu dan Arga Makmur. Bukti bahwa katalog ini hidup: gempa terjadi bahkan saat analisis dikerjakan.</a:t>
             </a:r>
           </a:p>
         </p:txBody>
@@ -8012,7 +8012,7 @@
                 </a:solidFill>
                 <a:latin typeface="Noto Sans"/>
               </a:rPr>
-              <a:t>Chart: 15 gempa M5+ terbaru versi BMKG (snapshot 20 Oktober 2026).</a:t>
+              <a:t>Chart: 15 gempa M5+ terbaru versi BMKG (snapshot 24 Oktober 2026).</a:t>
             </a:r>
           </a:p>
         </p:txBody>
